--- a/it/slides/15-Architettura_dei_Calcolatori-Memoria-Codice.pptx
+++ b/it/slides/15-Architettura_dei_Calcolatori-Memoria-Codice.pptx
@@ -123,21 +123,33 @@
   <p:extLst>
     <p:ext uri="{521415D9-36F7-43E2-AB2F-B90AF26B5E84}">
       <p14:sectionLst xmlns:p14="http://schemas.microsoft.com/office/powerpoint/2010/main">
-        <p14:section name="Apertura" id="{bc2bfcf2-d593-f025-9cf6-430378bee019}">
+        <p14:section name="Apertura" id="{2c0c7773-c096-65aa-83f2-c81a61fb2de6}">
           <p14:sldIdLst>
             <p14:sldId id="256"/>
             <p14:sldId id="257"/>
           </p14:sldIdLst>
         </p14:section>
-        <p14:section name="I listati" id="{d9f9f8cb-b35c-7b00-9240-fd850458a811}">
+        <p14:section name="Riscaldamento sulla macchina" id="{87244121-8751-e22e-a2e9-a735455bf0ba}">
           <p14:sldIdLst>
             <p14:sldId id="258"/>
+          </p14:sldIdLst>
+        </p14:section>
+        <p14:section name="La memoria centrale" id="{006a96b2-4cb1-2dcd-8210-a6a934f07e6b}">
+          <p14:sldIdLst>
             <p14:sldId id="259"/>
+          </p14:sldIdLst>
+        </p14:section>
+        <p14:section name="Processore e memoria" id="{aa37ae4e-fe75-45bc-7717-01d4e180a9aa}">
+          <p14:sldIdLst>
             <p14:sldId id="260"/>
+          </p14:sldIdLst>
+        </p14:section>
+        <p14:section name="Memoria e ingresso/uscita" id="{12feec07-6046-998e-b12e-64ab010ea77c}">
+          <p14:sldIdLst>
             <p14:sldId id="261"/>
           </p14:sldIdLst>
         </p14:section>
-        <p14:section name="Il programma completo" id="{d84a9f7a-fc19-b943-daab-e5962a96c1b8}">
+        <p14:section name="Il programma completo" id="{4ad25492-9b35-5c5f-ddbf-c03ea8a75af9}">
           <p14:sldIdLst>
             <p14:sldId id="262"/>
             <p14:sldId id="263"/>
@@ -146,7 +158,7 @@
             <p14:sldId id="266"/>
           </p14:sldIdLst>
         </p14:section>
-        <p14:section name="Eseguire e provare" id="{e8b3bc02-4d12-fb6e-30ab-12a36842da64}">
+        <p14:section name="Eseguire e provare" id="{62b3d7e6-b2ac-eea9-475b-da5bd33be2b4}">
           <p14:sldIdLst>
             <p14:sldId id="267"/>
             <p14:sldId id="268"/>
@@ -155,7 +167,7 @@
             <p14:sldId id="271"/>
           </p14:sldIdLst>
         </p14:section>
-        <p14:section name="Esercizi" id="{dc15fcdf-c9fd-58bd-3023-e9494206dfb2}">
+        <p14:section name="Esercizi" id="{10240f2d-62a7-f224-f7cf-49c694e4a6a6}">
           <p14:sldIdLst>
             <p14:sldId id="272"/>
           </p14:sldIdLst>
@@ -2962,7 +2974,63 @@
       </p:sp>
       <p:sp>
         <p:nvSpPr>
-          <p:cNvPr id="11" name="Shape 9"/>
+          <p:cNvPr id="11" name="Text 9"/>
+          <p:cNvSpPr txBox="1"/>
+          <p:nvPr/>
+        </p:nvSpPr>
+        <p:spPr>
+          <a:xfrm>
+            <a:off x="4693615" y="566928"/>
+            <a:ext cx="6949440" cy="640080"/>
+          </a:xfrm>
+          <a:prstGeom prst="rect">
+            <a:avLst/>
+          </a:prstGeom>
+          <a:noFill/>
+          <a:ln/>
+        </p:spPr>
+        <p:txBody>
+          <a:bodyPr wrap="square" lIns="0" tIns="0" rIns="0" bIns="0" rtlCol="0" anchor="t"/>
+          <a:lstStyle/>
+          <a:p>
+            <a:pPr algn="r" indent="0" marL="0">
+              <a:buNone/>
+            </a:pPr>
+            <a:r>
+              <a:rPr lang="en-US" sz="1300" dirty="0">
+                <a:solidFill>
+                  <a:srgbClr val="CFE3EA"/>
+                </a:solidFill>
+                <a:latin typeface="Calibri" pitchFamily="34" charset="0"/>
+                <a:ea typeface="Calibri" pitchFamily="34" charset="-122"/>
+                <a:cs typeface="Calibri" pitchFamily="34" charset="-120"/>
+              </a:rPr>
+              <a:t>Presentazione del codice. I concetti, le figure e le domande sono nella presentazione della lezione:</a:t>
+            </a:r>
+            <a:endParaRPr lang="en-US" sz="1300" dirty="0"/>
+          </a:p>
+          <a:p>
+            <a:pPr algn="r" indent="0" marL="0">
+              <a:buNone/>
+            </a:pPr>
+            <a:r>
+              <a:rPr lang="en-US" sz="1300" dirty="0">
+                <a:solidFill>
+                  <a:srgbClr val="CFE3EA"/>
+                </a:solidFill>
+                <a:latin typeface="Calibri" pitchFamily="34" charset="0"/>
+                <a:ea typeface="Calibri" pitchFamily="34" charset="-122"/>
+                <a:cs typeface="Calibri" pitchFamily="34" charset="-120"/>
+              </a:rPr>
+              <a:t>15-Architettura_dei_Calcolatori-Memoria.pptx</a:t>
+            </a:r>
+            <a:endParaRPr lang="en-US" sz="1300" dirty="0"/>
+          </a:p>
+        </p:txBody>
+      </p:sp>
+      <p:sp>
+        <p:nvSpPr>
+          <p:cNvPr id="12" name="Shape 10"/>
           <p:cNvSpPr/>
           <p:nvPr/>
         </p:nvSpPr>
@@ -2989,7 +3057,7 @@
       </p:sp>
       <p:pic>
         <p:nvPicPr>
-          <p:cNvPr id="12" name="Image 0" descr="/Users/raffaelemontella/devel/riscv-prg32/computer-architecture-with-prg32/tools/assets/prg32qt_debugger.png">    </p:cNvPr>
+          <p:cNvPr id="13" name="Image 0" descr="/Users/raffaelemontella/devel/riscv-prg32/computer-architecture-with-prg32/tools/assets/prg32qt_debugger.png">    </p:cNvPr>
           <p:cNvPicPr>
             <a:picLocks noChangeAspect="1"/>
           </p:cNvPicPr>

--- a/it/slides/15-Architettura_dei_Calcolatori-Memoria-Codice.pptx
+++ b/it/slides/15-Architettura_dei_Calcolatori-Memoria-Codice.pptx
@@ -123,33 +123,33 @@
   <p:extLst>
     <p:ext uri="{521415D9-36F7-43E2-AB2F-B90AF26B5E84}">
       <p14:sectionLst xmlns:p14="http://schemas.microsoft.com/office/powerpoint/2010/main">
-        <p14:section name="Apertura" id="{2c0c7773-c096-65aa-83f2-c81a61fb2de6}">
+        <p14:section name="Apertura" id="{aa63c37a-7936-693e-2415-9f505e08f6cc}">
           <p14:sldIdLst>
             <p14:sldId id="256"/>
             <p14:sldId id="257"/>
           </p14:sldIdLst>
         </p14:section>
-        <p14:section name="Riscaldamento sulla macchina" id="{87244121-8751-e22e-a2e9-a735455bf0ba}">
+        <p14:section name="Riscaldamento sulla macchina" id="{68a01ab5-0c9b-c101-918d-47746e9c154a}">
           <p14:sldIdLst>
             <p14:sldId id="258"/>
           </p14:sldIdLst>
         </p14:section>
-        <p14:section name="La memoria centrale" id="{006a96b2-4cb1-2dcd-8210-a6a934f07e6b}">
+        <p14:section name="La memoria centrale" id="{5e94a335-32a7-f009-1ff5-0c1415773c31}">
           <p14:sldIdLst>
             <p14:sldId id="259"/>
           </p14:sldIdLst>
         </p14:section>
-        <p14:section name="Processore e memoria" id="{aa37ae4e-fe75-45bc-7717-01d4e180a9aa}">
+        <p14:section name="Processore e memoria" id="{1b3b1ee3-05c1-7eb6-c3f9-410c8731187b}">
           <p14:sldIdLst>
             <p14:sldId id="260"/>
           </p14:sldIdLst>
         </p14:section>
-        <p14:section name="Memoria e ingresso/uscita" id="{12feec07-6046-998e-b12e-64ab010ea77c}">
+        <p14:section name="Memoria e ingresso/uscita" id="{13bbb170-496d-62e7-fc51-da98d40b475c}">
           <p14:sldIdLst>
             <p14:sldId id="261"/>
           </p14:sldIdLst>
         </p14:section>
-        <p14:section name="Il programma completo" id="{4ad25492-9b35-5c5f-ddbf-c03ea8a75af9}">
+        <p14:section name="Il programma completo" id="{914a8e34-ed91-5956-70aa-f1ab7dd7330c}">
           <p14:sldIdLst>
             <p14:sldId id="262"/>
             <p14:sldId id="263"/>
@@ -158,7 +158,7 @@
             <p14:sldId id="266"/>
           </p14:sldIdLst>
         </p14:section>
-        <p14:section name="Eseguire e provare" id="{62b3d7e6-b2ac-eea9-475b-da5bd33be2b4}">
+        <p14:section name="Eseguire e provare" id="{827187fa-5de3-bc10-e1a3-7a36531c520e}">
           <p14:sldIdLst>
             <p14:sldId id="267"/>
             <p14:sldId id="268"/>
@@ -167,7 +167,7 @@
             <p14:sldId id="271"/>
           </p14:sldIdLst>
         </p14:section>
-        <p14:section name="Esercizi" id="{10240f2d-62a7-f224-f7cf-49c694e4a6a6}">
+        <p14:section name="Esercizi" id="{51c53268-e1c5-de29-e13e-369b292fdcbc}">
           <p14:sldIdLst>
             <p14:sldId id="272"/>
           </p14:sldIdLst>
@@ -576,7 +576,9 @@
           <a:p>
             <a:r>
               <a:rPr lang="en-US" dirty="0"/>
-              <a:t>Questa è la presentazione del codice della Lezione 15. La presentazione della lezione contiene i concetti; questa contiene tutto ciò che si scrive e si esegue: i listati con la loro spiegazione, il programma completo, che cosa mostra, e il modo di provarlo su ciascuno dei tre host.</a:t>
+              <a:t>Questa è la presentazione del codice della Lezione 15. La presentazione della lezione contiene i concetti; questa contiene tutto ciò che si scrive e si esegue: i listati con la loro spiegazione, il programma completo, che cosa mostra, e il modo di provarlo su ciascuno dei tre host.
+Stato di apprendimento: DA COMPRENDERE OGGI, alla fine di questa lezione lo spiegate, lo seguite passo passo e lo applicate da soli; DA UTILIZZARE OGGI, oggi seguite e usate la ricetta; come funziona dentro si spiega più avanti, o non fa parte del corso; DA COMPRENDERE PIÙ AVANTI, riconoscete il nome e lo scopo; lo spiega una lezione successiva. Una slide senza etichetta è contesto: una storia, un esempio, una domanda, un esercizio.
+Stato di apprendimento di questa lezione. DA COMPRENDERE OGGI: memorie e indirizzi; l'ordine little-endian; processore e memoria; l'I/O mappato in memoria. DA UTILIZZARE OGGI: il programma completo, gli strumenti di PRG32 (si usa, non si studia, in questo corso). DA COMPRENDERE PIÙ AVANTI: niente. Una slide senza etichetta è contesto: una storia, un esempio, una domanda, un esercizio.</a:t>
             </a:r>
             <a:endParaRPr lang="en-US" dirty="0"/>
           </a:p>
@@ -665,6 +667,7 @@
             <a:r>
               <a:rPr lang="en-US" dirty="0"/>
               <a:t>Una pagina del programma completo, esattamente com'è nel repository. Leggetelo dall'inizio: l'intestazione dice che cosa mostra il programma e come compilarlo; seguono le tre funzioni init, update e draw, poi i dati. Le righe incontrate nei listati della lezione hanno qui gli stessi commenti.
+DA UTILIZZARE OGGI: il programma completo (si usa, non si studia, in questo corso).
 Per il docente: code/l15.S, come viene compilato ed eseguito dai test. I commenti fanno parte del programma, e sono in inglese come in tutti i listati: leggeteli con il codice.</a:t>
             </a:r>
             <a:endParaRPr lang="en-US" dirty="0"/>
@@ -754,6 +757,7 @@
             <a:r>
               <a:rPr lang="en-US" dirty="0"/>
               <a:t>Una pagina del programma completo, esattamente com'è nel repository. Leggetelo dall'inizio: l'intestazione dice che cosa mostra il programma e come compilarlo; seguono le tre funzioni init, update e draw, poi i dati. Le righe incontrate nei listati della lezione hanno qui gli stessi commenti.
+DA UTILIZZARE OGGI: il programma completo (si usa, non si studia, in questo corso).
 Per il docente: code/l15.S, come viene compilato ed eseguito dai test. I commenti fanno parte del programma, e sono in inglese come in tutti i listati: leggeteli con il codice.</a:t>
             </a:r>
             <a:endParaRPr lang="en-US" dirty="0"/>
@@ -932,6 +936,7 @@
             <a:r>
               <a:rPr lang="en-US" dirty="0"/>
               <a:t>La via più rapida: PRG32-QT sul vostro computer. Quattro passi, ciascuno con il suo comando. PRG32-QT si comporta come una scheda sulla porta 8080, ed è per questo che il comando di caricamento dice esp32c6. Con la modalità debug abilitata potete fermarvi su qualsiasi istruzione e leggere registri e memoria.
+DA UTILIZZARE OGGI: gli strumenti di PRG32 (si usa, non si studia, in questo corso).
 Per il docente: Eseguito dai test: la cartuccia di questa slide è compilata con questo comando ed eseguita sull'esecutore senza interfaccia di PRG32-QT. Senza la toolchain: importate il file .prg32 in PRG32-QT e scegliete Run Cartridge. Tasti: frecce o WASD per il joystick, Z o J per A, X o K per B, Invio per Start, Esc per tornare a Setup.</a:t>
             </a:r>
             <a:endParaRPr lang="en-US" dirty="0"/>
@@ -1021,6 +1026,7 @@
             <a:r>
               <a:rPr lang="en-US" dirty="0"/>
               <a:t>Lo stesso programma sull'emulatore. QEMU esegue il firmware vero su un chip emulato, quindi la cartuccia va compilata per l'architettura qemu. Caricate la cartuccia mentre QEMU è chiuso. Il firmware si apre sul menu Setup: scegliete Run Cartridge e lo slot. Ricordate che la tastiera è letta dal terminale, non dalla finestra con l'immagine.
+DA UTILIZZARE OGGI: gli strumenti di PRG32 (si usa, non si studia, in questo corso).
 Per il docente: Verificato dai test fino al caricamento: la cartuccia è compilata per l'architettura qemu e accettata nell'immagine flash dell'emulatore. Ciò che l'emulatore poi mostra non è verificato automaticamente: il QEMU di Espressif ha bisogno della sua finestra. Dall'ottobre 2026 il firmware parte da Setup: scegliete Run Cartridge, poi cart0.</a:t>
             </a:r>
             <a:endParaRPr lang="en-US" dirty="0"/>
@@ -1110,6 +1116,7 @@
             <a:r>
               <a:rPr lang="en-US" dirty="0"/>
               <a:t>Lo stesso programma sul kit. Il firmware si scrive una volta, via USB; dopo, le cartucce viaggiano sul Wi-Fi. Il comando di caricamento è quello usato per PRG32-QT con l'indirizzo della scheda. È l'unico host che i test automatici non eseguono: provatelo, e riferite ciò che vedete.
+DA UTILIZZARE OGGI: gli strumenti di PRG32 (si usa, non si studia, in questo corso).
 Per il docente: Non eseguito dai test: sulla macchina di prova non c'è una scheda. La cartuccia per l'architettura esp32c6 è compilata dai test; i passi sono quelli della documentazione di PRG32. Se la porta seriale non viene trovata, passatela esplicitamente. Per usare il Wi-Fi dell'aula: python3 -m prg32 wifi set --ssid NOME --password PASSWORD --mode sta.</a:t>
             </a:r>
             <a:endParaRPr lang="en-US" dirty="0"/>
@@ -1199,6 +1206,7 @@
             <a:r>
               <a:rPr lang="en-US" dirty="0"/>
               <a:t>I cinque sintomi più comuni, che cosa significa ciascuno, e che cosa fare. Leggete il messaggio prima di cambiare qualcosa: quasi sempre nomina la causa.
+DA UTILIZZARE OGGI: gli strumenti di PRG32 (si usa, non si studia, in questo corso).
 Per il docente: Le prime tre righe coprono la maggior parte dei casi. Quando chiedete aiuto, incollate il comando e l'intero messaggio come testo. docs/usage/troubleshooting.md del repository di PRG32 ha l'elenco completo.</a:t>
             </a:r>
             <a:endParaRPr lang="en-US" dirty="0"/>
@@ -1466,6 +1474,7 @@
             <a:r>
               <a:rPr lang="en-US" dirty="0"/>
               <a:t>value è una parola che contiene 0x12345678. lw la carica tutta in t1. Poi tre istruzioni lbu caricano byte singoli, all'indirizzo della parola, a quell'indirizzo più 1 e più 3: danno 0x78, 0x56 e 0x12. Ne seguono due fatti. Una parola occupa quattro indirizzi consecutivi, perché la memoria si indirizza byte per byte. E il byte all'indirizzo più basso è il meno significativo: l'ordine little-endian. Aprite la vista della memoria di PRG32-QT all'indirizzo contenuto in t0 e vedrete 78 56 34 12.
+DA COMPRENDERE OGGI: memorie e indirizzi.
 Per il docente: Eseguirlo in PRG32-QT e aprire la vista della memoria all'indirizzo contenuto in t0: i byte compaiono come 78 56 34 12. La slide sull'ordine dei byte della Lezione 04 diventa un esperimento.</a:t>
             </a:r>
             <a:endParaRPr lang="en-US" dirty="0"/>
@@ -1555,6 +1564,7 @@
             <a:r>
               <a:rPr lang="en-US" dirty="0"/>
               <a:t>Una parola è allineata quando comincia a un indirizzo multiplo della propria dimensione: un multiplo di 4 per le parole di 32 bit. Una parola allineata si preleva con un solo accesso; una non allineata sta a cavallo di due parole di memoria. In RISC-V l'assemblatore allinea per voi i dati .word, e un load da un indirizzo disallineato è, secondo il processore, più lento oppure rifiutato. Il codice a destra mostra il caso tipico: dopo una stringa di sei byte, .balign 4 salta due byte perché la parola successiva sia allineata.
+DA COMPRENDERE OGGI: memorie e indirizzi.
 Per il docente: La presentazione originale: l'MC68000 non ammette parole non allineate, l'Intel x86 le ammette al costo di due accessi. La specifica RISC-V lascia la scelta all'implementazione: i programmi corretti tengono allineati i propri dati.</a:t>
             </a:r>
             <a:endParaRPr lang="en-US" dirty="0"/>
@@ -1644,6 +1654,7 @@
             <a:r>
               <a:rPr lang="en-US" dirty="0"/>
               <a:t>I sei passi di lw t1, 0(t0). La ALU calcola l'indirizzo e lo mette in MA. MA pilota il bus indirizzi. L'unità di controllo alza l'abilitazione alla lettura. La memoria decodifica l'indirizzo e mette la parola sul bus dati. Il dato viene catturato in MB. MB viene copiato in t1. Uno store è simmetrico: l'indirizzo va in MA, il dato in MB, si alza l'abilitazione alla scrittura, e la memoria memorizza ciò che trova sul bus dati. Il tempo di accesso è quello che trascorre tra il secondo e il quinto passo.
+DA COMPRENDERE OGGI: processore e memoria.
 Per il docente: Uno store, sw t1, 0(t0), è simmetrico: indirizzo in MA, dato in MB, abilitazione alla scrittura alzata, e la memoria cattura il dato. Il tempo di accesso è il tempo tra il passo 2 e il passo 5.</a:t>
             </a:r>
             <a:endParaRPr lang="en-US" dirty="0"/>
@@ -1733,6 +1744,7 @@
             <a:r>
               <a:rPr lang="en-US" dirty="0"/>
               <a:t>Una mappa semplificata degli indirizzi dell'ESP32-C6. Gli indirizzi che cominciano con 0x4000 sono la ROM con il codice che avvia il chip; 0x4080 è la SRAM, dove viene caricata la vostra cartuccia; 0x4200 è la flash esterna con il firmware; 0x6000 sono i registri delle periferiche. Le stesse trentadue linee di indirizzo raggiungono tutto, e le stesse lw e sw fanno funzionare tutto. L'indirizzo della cartuccia visto nel debugger, 0x40800000, è l'inizio della RAM.
+DA COMPRENDERE OGGI: l'I/O mappato in memoria.
 Per il docente: Semplificato dal manuale tecnico dell'ESP32-C6; controllare il manuale prima di fare affidamento su un indirizzo. Il punto per gli studenti: le stesse trentadue linee di indirizzo raggiungono ROM, RAM, flash e ogni dispositivo, e le stesse lw e sw li fanno funzionare.</a:t>
             </a:r>
             <a:endParaRPr lang="en-US" dirty="0"/>
@@ -1822,6 +1834,7 @@
             <a:r>
               <a:rPr lang="en-US" dirty="0"/>
               <a:t>Una pagina del programma completo, esattamente com'è nel repository. Leggetelo dall'inizio: l'intestazione dice che cosa mostra il programma e come compilarlo; seguono le tre funzioni init, update e draw, poi i dati. Le righe incontrate nei listati della lezione hanno qui gli stessi commenti.
+DA UTILIZZARE OGGI: il programma completo (si usa, non si studia, in questo corso).
 Per il docente: code/l15.S, come viene compilato ed eseguito dai test. I commenti fanno parte del programma, e sono in inglese come in tutti i listati: leggeteli con il codice.</a:t>
             </a:r>
             <a:endParaRPr lang="en-US" dirty="0"/>
@@ -1911,6 +1924,7 @@
             <a:r>
               <a:rPr lang="en-US" dirty="0"/>
               <a:t>Una pagina del programma completo, esattamente com'è nel repository. Leggetelo dall'inizio: l'intestazione dice che cosa mostra il programma e come compilarlo; seguono le tre funzioni init, update e draw, poi i dati. Le righe incontrate nei listati della lezione hanno qui gli stessi commenti.
+DA UTILIZZARE OGGI: il programma completo (si usa, non si studia, in questo corso).
 Per il docente: code/l15.S, come viene compilato ed eseguito dai test. I commenti fanno parte del programma, e sono in inglese come in tutti i listati: leggeteli con il codice.</a:t>
             </a:r>
             <a:endParaRPr lang="en-US" dirty="0"/>
@@ -2000,6 +2014,7 @@
             <a:r>
               <a:rPr lang="en-US" dirty="0"/>
               <a:t>Una pagina del programma completo, esattamente com'è nel repository. Leggetelo dall'inizio: l'intestazione dice che cosa mostra il programma e come compilarlo; seguono le tre funzioni init, update e draw, poi i dati. Le righe incontrate nei listati della lezione hanno qui gli stessi commenti.
+DA UTILIZZARE OGGI: il programma completo (si usa, non si studia, in questo corso).
 Per il docente: code/l15.S, come viene compilato ed eseguito dai test. I commenti fanno parte del programma, e sono in inglese come in tutti i listati: leggeteli con il codice.</a:t>
             </a:r>
             <a:endParaRPr lang="en-US" dirty="0"/>
@@ -3081,6 +3096,420 @@
       </p:pic>
       <p:sp>
         <p:nvSpPr>
+          <p:cNvPr id="14" name="Shape 11"/>
+          <p:cNvSpPr/>
+          <p:nvPr/>
+        </p:nvSpPr>
+        <p:spPr>
+          <a:xfrm>
+            <a:off x="8910777" y="91440"/>
+            <a:ext cx="2732278" cy="274320"/>
+          </a:xfrm>
+          <a:prstGeom prst="rect">
+            <a:avLst/>
+          </a:prstGeom>
+          <a:solidFill>
+            <a:srgbClr val="F3E8FF"/>
+          </a:solidFill>
+          <a:ln w="12700">
+            <a:solidFill>
+              <a:srgbClr val="7E22CE"/>
+            </a:solidFill>
+            <a:prstDash val="dash"/>
+          </a:ln>
+        </p:spPr>
+      </p:sp>
+      <p:sp>
+        <p:nvSpPr>
+          <p:cNvPr id="15" name="Shape 12"/>
+          <p:cNvSpPr/>
+          <p:nvPr/>
+        </p:nvSpPr>
+        <p:spPr>
+          <a:xfrm>
+            <a:off x="8938209" y="128016"/>
+            <a:ext cx="45720" cy="45720"/>
+          </a:xfrm>
+          <a:prstGeom prst="rect">
+            <a:avLst/>
+          </a:prstGeom>
+          <a:solidFill>
+            <a:srgbClr val="7E22CE"/>
+          </a:solidFill>
+          <a:ln w="12700">
+            <a:solidFill>
+              <a:srgbClr val="7E22CE"/>
+            </a:solidFill>
+            <a:prstDash val="solid"/>
+          </a:ln>
+        </p:spPr>
+      </p:sp>
+      <p:sp>
+        <p:nvSpPr>
+          <p:cNvPr id="16" name="Shape 13"/>
+          <p:cNvSpPr/>
+          <p:nvPr/>
+        </p:nvSpPr>
+        <p:spPr>
+          <a:xfrm>
+            <a:off x="8938209" y="205740"/>
+            <a:ext cx="45720" cy="45720"/>
+          </a:xfrm>
+          <a:prstGeom prst="rect">
+            <a:avLst/>
+          </a:prstGeom>
+          <a:solidFill>
+            <a:srgbClr val="7E22CE"/>
+          </a:solidFill>
+          <a:ln w="12700">
+            <a:solidFill>
+              <a:srgbClr val="7E22CE"/>
+            </a:solidFill>
+            <a:prstDash val="solid"/>
+          </a:ln>
+        </p:spPr>
+      </p:sp>
+      <p:sp>
+        <p:nvSpPr>
+          <p:cNvPr id="17" name="Shape 14"/>
+          <p:cNvSpPr/>
+          <p:nvPr/>
+        </p:nvSpPr>
+        <p:spPr>
+          <a:xfrm>
+            <a:off x="8938209" y="283464"/>
+            <a:ext cx="45720" cy="45720"/>
+          </a:xfrm>
+          <a:prstGeom prst="rect">
+            <a:avLst/>
+          </a:prstGeom>
+          <a:solidFill>
+            <a:srgbClr val="7E22CE"/>
+          </a:solidFill>
+          <a:ln w="12700">
+            <a:solidFill>
+              <a:srgbClr val="7E22CE"/>
+            </a:solidFill>
+            <a:prstDash val="solid"/>
+          </a:ln>
+        </p:spPr>
+      </p:sp>
+      <p:pic>
+        <p:nvPicPr>
+          <p:cNvPr id="18" name="Image 1" descr="preencoded.png">    </p:cNvPr>
+          <p:cNvPicPr>
+            <a:picLocks noChangeAspect="1"/>
+          </p:cNvPicPr>
+          <p:nvPr/>
+        </p:nvPicPr>
+        <p:blipFill>
+          <a:blip r:embed="rId2"/>
+          <a:stretch>
+            <a:fillRect/>
+          </a:stretch>
+        </p:blipFill>
+        <p:spPr>
+          <a:xfrm>
+            <a:off x="9038793" y="128016"/>
+            <a:ext cx="201168" cy="201168"/>
+          </a:xfrm>
+          <a:prstGeom prst="rect">
+            <a:avLst/>
+          </a:prstGeom>
+        </p:spPr>
+      </p:pic>
+      <p:sp>
+        <p:nvSpPr>
+          <p:cNvPr id="19" name="Text 15"/>
+          <p:cNvSpPr txBox="1"/>
+          <p:nvPr/>
+        </p:nvSpPr>
+        <p:spPr>
+          <a:xfrm>
+            <a:off x="9294825" y="91440"/>
+            <a:ext cx="2311654" cy="274320"/>
+          </a:xfrm>
+          <a:prstGeom prst="rect">
+            <a:avLst/>
+          </a:prstGeom>
+          <a:noFill/>
+          <a:ln/>
+        </p:spPr>
+        <p:txBody>
+          <a:bodyPr wrap="square" lIns="0" tIns="0" rIns="0" bIns="0" rtlCol="0" anchor="ctr"/>
+          <a:lstStyle/>
+          <a:p>
+            <a:pPr indent="0" marL="0">
+              <a:buNone/>
+            </a:pPr>
+            <a:r>
+              <a:rPr lang="en-US" sz="1100" b="1" dirty="0">
+                <a:solidFill>
+                  <a:srgbClr val="6B21A8"/>
+                </a:solidFill>
+                <a:latin typeface="Calibri" pitchFamily="34" charset="0"/>
+                <a:ea typeface="Calibri" pitchFamily="34" charset="-122"/>
+                <a:cs typeface="Calibri" pitchFamily="34" charset="-120"/>
+              </a:rPr>
+              <a:t>DA COMPRENDERE PIÙ AVANTI</a:t>
+            </a:r>
+            <a:endParaRPr lang="en-US" sz="1100" dirty="0"/>
+          </a:p>
+        </p:txBody>
+      </p:sp>
+      <p:sp>
+        <p:nvSpPr>
+          <p:cNvPr id="20" name="Shape 16"/>
+          <p:cNvSpPr/>
+          <p:nvPr/>
+        </p:nvSpPr>
+        <p:spPr>
+          <a:xfrm>
+            <a:off x="6675069" y="91440"/>
+            <a:ext cx="2125980" cy="274320"/>
+          </a:xfrm>
+          <a:prstGeom prst="rect">
+            <a:avLst/>
+          </a:prstGeom>
+          <a:solidFill>
+            <a:srgbClr val="FEF3C7"/>
+          </a:solidFill>
+          <a:ln w="12700">
+            <a:solidFill>
+              <a:srgbClr val="B45309"/>
+            </a:solidFill>
+            <a:prstDash val="solid"/>
+          </a:ln>
+        </p:spPr>
+      </p:sp>
+      <p:sp>
+        <p:nvSpPr>
+          <p:cNvPr id="21" name="Shape 17"/>
+          <p:cNvSpPr/>
+          <p:nvPr/>
+        </p:nvSpPr>
+        <p:spPr>
+          <a:xfrm>
+            <a:off x="6675069" y="91440"/>
+            <a:ext cx="27432" cy="274320"/>
+          </a:xfrm>
+          <a:prstGeom prst="rect">
+            <a:avLst/>
+          </a:prstGeom>
+          <a:solidFill>
+            <a:srgbClr val="B45309"/>
+          </a:solidFill>
+          <a:ln w="12700">
+            <a:solidFill>
+              <a:srgbClr val="B45309"/>
+            </a:solidFill>
+            <a:prstDash val="solid"/>
+          </a:ln>
+        </p:spPr>
+      </p:sp>
+      <p:sp>
+        <p:nvSpPr>
+          <p:cNvPr id="22" name="Shape 18"/>
+          <p:cNvSpPr/>
+          <p:nvPr/>
+        </p:nvSpPr>
+        <p:spPr>
+          <a:xfrm>
+            <a:off x="6729933" y="91440"/>
+            <a:ext cx="27432" cy="274320"/>
+          </a:xfrm>
+          <a:prstGeom prst="rect">
+            <a:avLst/>
+          </a:prstGeom>
+          <a:solidFill>
+            <a:srgbClr val="B45309"/>
+          </a:solidFill>
+          <a:ln w="12700">
+            <a:solidFill>
+              <a:srgbClr val="B45309"/>
+            </a:solidFill>
+            <a:prstDash val="solid"/>
+          </a:ln>
+        </p:spPr>
+      </p:sp>
+      <p:pic>
+        <p:nvPicPr>
+          <p:cNvPr id="23" name="Image 2" descr="preencoded.png">    </p:cNvPr>
+          <p:cNvPicPr>
+            <a:picLocks noChangeAspect="1"/>
+          </p:cNvPicPr>
+          <p:nvPr/>
+        </p:nvPicPr>
+        <p:blipFill>
+          <a:blip r:embed="rId3"/>
+          <a:stretch>
+            <a:fillRect/>
+          </a:stretch>
+        </p:blipFill>
+        <p:spPr>
+          <a:xfrm>
+            <a:off x="6803085" y="128016"/>
+            <a:ext cx="201168" cy="201168"/>
+          </a:xfrm>
+          <a:prstGeom prst="rect">
+            <a:avLst/>
+          </a:prstGeom>
+        </p:spPr>
+      </p:pic>
+      <p:sp>
+        <p:nvSpPr>
+          <p:cNvPr id="24" name="Text 19"/>
+          <p:cNvSpPr txBox="1"/>
+          <p:nvPr/>
+        </p:nvSpPr>
+        <p:spPr>
+          <a:xfrm>
+            <a:off x="7059117" y="91440"/>
+            <a:ext cx="1705356" cy="274320"/>
+          </a:xfrm>
+          <a:prstGeom prst="rect">
+            <a:avLst/>
+          </a:prstGeom>
+          <a:noFill/>
+          <a:ln/>
+        </p:spPr>
+        <p:txBody>
+          <a:bodyPr wrap="square" lIns="0" tIns="0" rIns="0" bIns="0" rtlCol="0" anchor="ctr"/>
+          <a:lstStyle/>
+          <a:p>
+            <a:pPr indent="0" marL="0">
+              <a:buNone/>
+            </a:pPr>
+            <a:r>
+              <a:rPr lang="en-US" sz="1100" b="1" dirty="0">
+                <a:solidFill>
+                  <a:srgbClr val="92400E"/>
+                </a:solidFill>
+                <a:latin typeface="Calibri" pitchFamily="34" charset="0"/>
+                <a:ea typeface="Calibri" pitchFamily="34" charset="-122"/>
+                <a:cs typeface="Calibri" pitchFamily="34" charset="-120"/>
+              </a:rPr>
+              <a:t>DA UTILIZZARE OGGI</a:t>
+            </a:r>
+            <a:endParaRPr lang="en-US" sz="1100" dirty="0"/>
+          </a:p>
+        </p:txBody>
+      </p:sp>
+      <p:sp>
+        <p:nvSpPr>
+          <p:cNvPr id="25" name="Shape 20"/>
+          <p:cNvSpPr/>
+          <p:nvPr/>
+        </p:nvSpPr>
+        <p:spPr>
+          <a:xfrm>
+            <a:off x="4352747" y="91440"/>
+            <a:ext cx="2212594" cy="274320"/>
+          </a:xfrm>
+          <a:prstGeom prst="rect">
+            <a:avLst/>
+          </a:prstGeom>
+          <a:solidFill>
+            <a:srgbClr val="E0F2FE"/>
+          </a:solidFill>
+          <a:ln w="12700">
+            <a:solidFill>
+              <a:srgbClr val="0369A1"/>
+            </a:solidFill>
+            <a:prstDash val="solid"/>
+          </a:ln>
+        </p:spPr>
+      </p:sp>
+      <p:sp>
+        <p:nvSpPr>
+          <p:cNvPr id="26" name="Shape 21"/>
+          <p:cNvSpPr/>
+          <p:nvPr/>
+        </p:nvSpPr>
+        <p:spPr>
+          <a:xfrm>
+            <a:off x="4352747" y="91440"/>
+            <a:ext cx="73152" cy="274320"/>
+          </a:xfrm>
+          <a:prstGeom prst="rect">
+            <a:avLst/>
+          </a:prstGeom>
+          <a:solidFill>
+            <a:srgbClr val="0369A1"/>
+          </a:solidFill>
+          <a:ln w="12700">
+            <a:solidFill>
+              <a:srgbClr val="0369A1"/>
+            </a:solidFill>
+            <a:prstDash val="solid"/>
+          </a:ln>
+        </p:spPr>
+      </p:sp>
+      <p:pic>
+        <p:nvPicPr>
+          <p:cNvPr id="27" name="Image 3" descr="preencoded.png">    </p:cNvPr>
+          <p:cNvPicPr>
+            <a:picLocks noChangeAspect="1"/>
+          </p:cNvPicPr>
+          <p:nvPr/>
+        </p:nvPicPr>
+        <p:blipFill>
+          <a:blip r:embed="rId4"/>
+          <a:stretch>
+            <a:fillRect/>
+          </a:stretch>
+        </p:blipFill>
+        <p:spPr>
+          <a:xfrm>
+            <a:off x="4480763" y="128016"/>
+            <a:ext cx="201168" cy="201168"/>
+          </a:xfrm>
+          <a:prstGeom prst="rect">
+            <a:avLst/>
+          </a:prstGeom>
+        </p:spPr>
+      </p:pic>
+      <p:sp>
+        <p:nvSpPr>
+          <p:cNvPr id="28" name="Text 22"/>
+          <p:cNvSpPr txBox="1"/>
+          <p:nvPr/>
+        </p:nvSpPr>
+        <p:spPr>
+          <a:xfrm>
+            <a:off x="4736795" y="91440"/>
+            <a:ext cx="1791970" cy="274320"/>
+          </a:xfrm>
+          <a:prstGeom prst="rect">
+            <a:avLst/>
+          </a:prstGeom>
+          <a:noFill/>
+          <a:ln/>
+        </p:spPr>
+        <p:txBody>
+          <a:bodyPr wrap="square" lIns="0" tIns="0" rIns="0" bIns="0" rtlCol="0" anchor="ctr"/>
+          <a:lstStyle/>
+          <a:p>
+            <a:pPr indent="0" marL="0">
+              <a:buNone/>
+            </a:pPr>
+            <a:r>
+              <a:rPr lang="en-US" sz="1100" b="1" dirty="0">
+                <a:solidFill>
+                  <a:srgbClr val="075985"/>
+                </a:solidFill>
+                <a:latin typeface="Calibri" pitchFamily="34" charset="0"/>
+                <a:ea typeface="Calibri" pitchFamily="34" charset="-122"/>
+                <a:cs typeface="Calibri" pitchFamily="34" charset="-120"/>
+              </a:rPr>
+              <a:t>DA COMPRENDERE OGGI</a:t>
+            </a:r>
+            <a:endParaRPr lang="en-US" sz="1100" dirty="0"/>
+          </a:p>
+        </p:txBody>
+      </p:sp>
+      <p:sp>
+        <p:nvSpPr>
           <p:cNvPr id="25" name="Slide Number Placeholder 0"/>
           <p:cNvSpPr>
             <a:spLocks noGrp="1"/>
@@ -3792,6 +4221,158 @@
       </p:sp>
       <p:sp>
         <p:nvSpPr>
+          <p:cNvPr id="5" name="Shape 3"/>
+          <p:cNvSpPr/>
+          <p:nvPr/>
+        </p:nvSpPr>
+        <p:spPr>
+          <a:xfrm>
+            <a:off x="7941259" y="91440"/>
+            <a:ext cx="3701796" cy="274320"/>
+          </a:xfrm>
+          <a:prstGeom prst="rect">
+            <a:avLst/>
+          </a:prstGeom>
+          <a:solidFill>
+            <a:srgbClr val="FEF3C7"/>
+          </a:solidFill>
+          <a:ln w="12700">
+            <a:solidFill>
+              <a:srgbClr val="B45309"/>
+            </a:solidFill>
+            <a:prstDash val="solid"/>
+          </a:ln>
+        </p:spPr>
+      </p:sp>
+      <p:sp>
+        <p:nvSpPr>
+          <p:cNvPr id="6" name="Shape 4"/>
+          <p:cNvSpPr/>
+          <p:nvPr/>
+        </p:nvSpPr>
+        <p:spPr>
+          <a:xfrm>
+            <a:off x="7941259" y="91440"/>
+            <a:ext cx="27432" cy="274320"/>
+          </a:xfrm>
+          <a:prstGeom prst="rect">
+            <a:avLst/>
+          </a:prstGeom>
+          <a:solidFill>
+            <a:srgbClr val="B45309"/>
+          </a:solidFill>
+          <a:ln w="12700">
+            <a:solidFill>
+              <a:srgbClr val="B45309"/>
+            </a:solidFill>
+            <a:prstDash val="solid"/>
+          </a:ln>
+        </p:spPr>
+      </p:sp>
+      <p:sp>
+        <p:nvSpPr>
+          <p:cNvPr id="7" name="Shape 5"/>
+          <p:cNvSpPr/>
+          <p:nvPr/>
+        </p:nvSpPr>
+        <p:spPr>
+          <a:xfrm>
+            <a:off x="7996123" y="91440"/>
+            <a:ext cx="27432" cy="274320"/>
+          </a:xfrm>
+          <a:prstGeom prst="rect">
+            <a:avLst/>
+          </a:prstGeom>
+          <a:solidFill>
+            <a:srgbClr val="B45309"/>
+          </a:solidFill>
+          <a:ln w="12700">
+            <a:solidFill>
+              <a:srgbClr val="B45309"/>
+            </a:solidFill>
+            <a:prstDash val="solid"/>
+          </a:ln>
+        </p:spPr>
+      </p:sp>
+      <p:pic>
+        <p:nvPicPr>
+          <p:cNvPr id="8" name="Image 0" descr="preencoded.png">    </p:cNvPr>
+          <p:cNvPicPr>
+            <a:picLocks noChangeAspect="1"/>
+          </p:cNvPicPr>
+          <p:nvPr/>
+        </p:nvPicPr>
+        <p:blipFill>
+          <a:blip r:embed="rId1"/>
+          <a:stretch>
+            <a:fillRect/>
+          </a:stretch>
+        </p:blipFill>
+        <p:spPr>
+          <a:xfrm>
+            <a:off x="8069275" y="128016"/>
+            <a:ext cx="201168" cy="201168"/>
+          </a:xfrm>
+          <a:prstGeom prst="rect">
+            <a:avLst/>
+          </a:prstGeom>
+        </p:spPr>
+      </p:pic>
+      <p:sp>
+        <p:nvSpPr>
+          <p:cNvPr id="9" name="Text 6"/>
+          <p:cNvSpPr txBox="1"/>
+          <p:nvPr/>
+        </p:nvSpPr>
+        <p:spPr>
+          <a:xfrm>
+            <a:off x="8325307" y="91440"/>
+            <a:ext cx="3281172" cy="274320"/>
+          </a:xfrm>
+          <a:prstGeom prst="rect">
+            <a:avLst/>
+          </a:prstGeom>
+          <a:noFill/>
+          <a:ln/>
+        </p:spPr>
+        <p:txBody>
+          <a:bodyPr wrap="square" lIns="0" tIns="0" rIns="0" bIns="0" rtlCol="0" anchor="ctr"/>
+          <a:lstStyle/>
+          <a:p>
+            <a:pPr indent="0" marL="0">
+              <a:buNone/>
+            </a:pPr>
+            <a:r>
+              <a:rPr lang="en-US" sz="1100" b="1" dirty="0">
+                <a:solidFill>
+                  <a:srgbClr val="92400E"/>
+                </a:solidFill>
+                <a:latin typeface="Calibri" pitchFamily="34" charset="0"/>
+                <a:ea typeface="Calibri" pitchFamily="34" charset="-122"/>
+                <a:cs typeface="Calibri" pitchFamily="34" charset="-120"/>
+              </a:rPr>
+              <a:t>DA UTILIZZARE OGGI</a:t>
+            </a:r>
+            <a:pPr indent="0" marL="0">
+              <a:buNone/>
+            </a:pPr>
+            <a:r>
+              <a:rPr lang="en-US" sz="1100" dirty="0">
+                <a:solidFill>
+                  <a:srgbClr val="92400E"/>
+                </a:solidFill>
+                <a:latin typeface="Calibri" pitchFamily="34" charset="0"/>
+                <a:ea typeface="Calibri" pitchFamily="34" charset="-122"/>
+                <a:cs typeface="Calibri" pitchFamily="34" charset="-120"/>
+              </a:rPr>
+              <a:t> · il programma completo</a:t>
+            </a:r>
+            <a:endParaRPr lang="en-US" sz="1100" dirty="0"/>
+          </a:p>
+        </p:txBody>
+      </p:sp>
+      <p:sp>
+        <p:nvSpPr>
           <p:cNvPr id="25" name="Slide Number Placeholder 0"/>
           <p:cNvSpPr>
             <a:spLocks noGrp="1"/>
@@ -4176,6 +4757,158 @@
       </p:sp>
       <p:sp>
         <p:nvSpPr>
+          <p:cNvPr id="5" name="Shape 3"/>
+          <p:cNvSpPr/>
+          <p:nvPr/>
+        </p:nvSpPr>
+        <p:spPr>
+          <a:xfrm>
+            <a:off x="7941259" y="91440"/>
+            <a:ext cx="3701796" cy="274320"/>
+          </a:xfrm>
+          <a:prstGeom prst="rect">
+            <a:avLst/>
+          </a:prstGeom>
+          <a:solidFill>
+            <a:srgbClr val="FEF3C7"/>
+          </a:solidFill>
+          <a:ln w="12700">
+            <a:solidFill>
+              <a:srgbClr val="B45309"/>
+            </a:solidFill>
+            <a:prstDash val="solid"/>
+          </a:ln>
+        </p:spPr>
+      </p:sp>
+      <p:sp>
+        <p:nvSpPr>
+          <p:cNvPr id="6" name="Shape 4"/>
+          <p:cNvSpPr/>
+          <p:nvPr/>
+        </p:nvSpPr>
+        <p:spPr>
+          <a:xfrm>
+            <a:off x="7941259" y="91440"/>
+            <a:ext cx="27432" cy="274320"/>
+          </a:xfrm>
+          <a:prstGeom prst="rect">
+            <a:avLst/>
+          </a:prstGeom>
+          <a:solidFill>
+            <a:srgbClr val="B45309"/>
+          </a:solidFill>
+          <a:ln w="12700">
+            <a:solidFill>
+              <a:srgbClr val="B45309"/>
+            </a:solidFill>
+            <a:prstDash val="solid"/>
+          </a:ln>
+        </p:spPr>
+      </p:sp>
+      <p:sp>
+        <p:nvSpPr>
+          <p:cNvPr id="7" name="Shape 5"/>
+          <p:cNvSpPr/>
+          <p:nvPr/>
+        </p:nvSpPr>
+        <p:spPr>
+          <a:xfrm>
+            <a:off x="7996123" y="91440"/>
+            <a:ext cx="27432" cy="274320"/>
+          </a:xfrm>
+          <a:prstGeom prst="rect">
+            <a:avLst/>
+          </a:prstGeom>
+          <a:solidFill>
+            <a:srgbClr val="B45309"/>
+          </a:solidFill>
+          <a:ln w="12700">
+            <a:solidFill>
+              <a:srgbClr val="B45309"/>
+            </a:solidFill>
+            <a:prstDash val="solid"/>
+          </a:ln>
+        </p:spPr>
+      </p:sp>
+      <p:pic>
+        <p:nvPicPr>
+          <p:cNvPr id="8" name="Image 0" descr="preencoded.png">    </p:cNvPr>
+          <p:cNvPicPr>
+            <a:picLocks noChangeAspect="1"/>
+          </p:cNvPicPr>
+          <p:nvPr/>
+        </p:nvPicPr>
+        <p:blipFill>
+          <a:blip r:embed="rId1"/>
+          <a:stretch>
+            <a:fillRect/>
+          </a:stretch>
+        </p:blipFill>
+        <p:spPr>
+          <a:xfrm>
+            <a:off x="8069275" y="128016"/>
+            <a:ext cx="201168" cy="201168"/>
+          </a:xfrm>
+          <a:prstGeom prst="rect">
+            <a:avLst/>
+          </a:prstGeom>
+        </p:spPr>
+      </p:pic>
+      <p:sp>
+        <p:nvSpPr>
+          <p:cNvPr id="9" name="Text 6"/>
+          <p:cNvSpPr txBox="1"/>
+          <p:nvPr/>
+        </p:nvSpPr>
+        <p:spPr>
+          <a:xfrm>
+            <a:off x="8325307" y="91440"/>
+            <a:ext cx="3281172" cy="274320"/>
+          </a:xfrm>
+          <a:prstGeom prst="rect">
+            <a:avLst/>
+          </a:prstGeom>
+          <a:noFill/>
+          <a:ln/>
+        </p:spPr>
+        <p:txBody>
+          <a:bodyPr wrap="square" lIns="0" tIns="0" rIns="0" bIns="0" rtlCol="0" anchor="ctr"/>
+          <a:lstStyle/>
+          <a:p>
+            <a:pPr indent="0" marL="0">
+              <a:buNone/>
+            </a:pPr>
+            <a:r>
+              <a:rPr lang="en-US" sz="1100" b="1" dirty="0">
+                <a:solidFill>
+                  <a:srgbClr val="92400E"/>
+                </a:solidFill>
+                <a:latin typeface="Calibri" pitchFamily="34" charset="0"/>
+                <a:ea typeface="Calibri" pitchFamily="34" charset="-122"/>
+                <a:cs typeface="Calibri" pitchFamily="34" charset="-120"/>
+              </a:rPr>
+              <a:t>DA UTILIZZARE OGGI</a:t>
+            </a:r>
+            <a:pPr indent="0" marL="0">
+              <a:buNone/>
+            </a:pPr>
+            <a:r>
+              <a:rPr lang="en-US" sz="1100" dirty="0">
+                <a:solidFill>
+                  <a:srgbClr val="92400E"/>
+                </a:solidFill>
+                <a:latin typeface="Calibri" pitchFamily="34" charset="0"/>
+                <a:ea typeface="Calibri" pitchFamily="34" charset="-122"/>
+                <a:cs typeface="Calibri" pitchFamily="34" charset="-120"/>
+              </a:rPr>
+              <a:t> · il programma completo</a:t>
+            </a:r>
+            <a:endParaRPr lang="en-US" sz="1100" dirty="0"/>
+          </a:p>
+        </p:txBody>
+      </p:sp>
+      <p:sp>
+        <p:nvSpPr>
           <p:cNvPr id="25" name="Slide Number Placeholder 0"/>
           <p:cNvSpPr>
             <a:spLocks noGrp="1"/>
@@ -5329,6 +6062,158 @@
       </p:sp>
       <p:sp>
         <p:nvSpPr>
+          <p:cNvPr id="17" name="Shape 15"/>
+          <p:cNvSpPr/>
+          <p:nvPr/>
+        </p:nvSpPr>
+        <p:spPr>
+          <a:xfrm>
+            <a:off x="7875600" y="91440"/>
+            <a:ext cx="3767455" cy="274320"/>
+          </a:xfrm>
+          <a:prstGeom prst="rect">
+            <a:avLst/>
+          </a:prstGeom>
+          <a:solidFill>
+            <a:srgbClr val="FEF3C7"/>
+          </a:solidFill>
+          <a:ln w="12700">
+            <a:solidFill>
+              <a:srgbClr val="B45309"/>
+            </a:solidFill>
+            <a:prstDash val="solid"/>
+          </a:ln>
+        </p:spPr>
+      </p:sp>
+      <p:sp>
+        <p:nvSpPr>
+          <p:cNvPr id="18" name="Shape 16"/>
+          <p:cNvSpPr/>
+          <p:nvPr/>
+        </p:nvSpPr>
+        <p:spPr>
+          <a:xfrm>
+            <a:off x="7875600" y="91440"/>
+            <a:ext cx="27432" cy="274320"/>
+          </a:xfrm>
+          <a:prstGeom prst="rect">
+            <a:avLst/>
+          </a:prstGeom>
+          <a:solidFill>
+            <a:srgbClr val="B45309"/>
+          </a:solidFill>
+          <a:ln w="12700">
+            <a:solidFill>
+              <a:srgbClr val="B45309"/>
+            </a:solidFill>
+            <a:prstDash val="solid"/>
+          </a:ln>
+        </p:spPr>
+      </p:sp>
+      <p:sp>
+        <p:nvSpPr>
+          <p:cNvPr id="19" name="Shape 17"/>
+          <p:cNvSpPr/>
+          <p:nvPr/>
+        </p:nvSpPr>
+        <p:spPr>
+          <a:xfrm>
+            <a:off x="7930464" y="91440"/>
+            <a:ext cx="27432" cy="274320"/>
+          </a:xfrm>
+          <a:prstGeom prst="rect">
+            <a:avLst/>
+          </a:prstGeom>
+          <a:solidFill>
+            <a:srgbClr val="B45309"/>
+          </a:solidFill>
+          <a:ln w="12700">
+            <a:solidFill>
+              <a:srgbClr val="B45309"/>
+            </a:solidFill>
+            <a:prstDash val="solid"/>
+          </a:ln>
+        </p:spPr>
+      </p:sp>
+      <p:pic>
+        <p:nvPicPr>
+          <p:cNvPr id="20" name="Image 0" descr="preencoded.png">    </p:cNvPr>
+          <p:cNvPicPr>
+            <a:picLocks noChangeAspect="1"/>
+          </p:cNvPicPr>
+          <p:nvPr/>
+        </p:nvPicPr>
+        <p:blipFill>
+          <a:blip r:embed="rId1"/>
+          <a:stretch>
+            <a:fillRect/>
+          </a:stretch>
+        </p:blipFill>
+        <p:spPr>
+          <a:xfrm>
+            <a:off x="8003616" y="128016"/>
+            <a:ext cx="201168" cy="201168"/>
+          </a:xfrm>
+          <a:prstGeom prst="rect">
+            <a:avLst/>
+          </a:prstGeom>
+        </p:spPr>
+      </p:pic>
+      <p:sp>
+        <p:nvSpPr>
+          <p:cNvPr id="21" name="Text 18"/>
+          <p:cNvSpPr txBox="1"/>
+          <p:nvPr/>
+        </p:nvSpPr>
+        <p:spPr>
+          <a:xfrm>
+            <a:off x="8259648" y="91440"/>
+            <a:ext cx="3346831" cy="274320"/>
+          </a:xfrm>
+          <a:prstGeom prst="rect">
+            <a:avLst/>
+          </a:prstGeom>
+          <a:noFill/>
+          <a:ln/>
+        </p:spPr>
+        <p:txBody>
+          <a:bodyPr wrap="square" lIns="0" tIns="0" rIns="0" bIns="0" rtlCol="0" anchor="ctr"/>
+          <a:lstStyle/>
+          <a:p>
+            <a:pPr indent="0" marL="0">
+              <a:buNone/>
+            </a:pPr>
+            <a:r>
+              <a:rPr lang="en-US" sz="1100" b="1" dirty="0">
+                <a:solidFill>
+                  <a:srgbClr val="92400E"/>
+                </a:solidFill>
+                <a:latin typeface="Calibri" pitchFamily="34" charset="0"/>
+                <a:ea typeface="Calibri" pitchFamily="34" charset="-122"/>
+                <a:cs typeface="Calibri" pitchFamily="34" charset="-120"/>
+              </a:rPr>
+              <a:t>DA UTILIZZARE OGGI</a:t>
+            </a:r>
+            <a:pPr indent="0" marL="0">
+              <a:buNone/>
+            </a:pPr>
+            <a:r>
+              <a:rPr lang="en-US" sz="1100" dirty="0">
+                <a:solidFill>
+                  <a:srgbClr val="92400E"/>
+                </a:solidFill>
+                <a:latin typeface="Calibri" pitchFamily="34" charset="0"/>
+                <a:ea typeface="Calibri" pitchFamily="34" charset="-122"/>
+                <a:cs typeface="Calibri" pitchFamily="34" charset="-120"/>
+              </a:rPr>
+              <a:t> · gli strumenti di PRG32</a:t>
+            </a:r>
+            <a:endParaRPr lang="en-US" sz="1100" dirty="0"/>
+          </a:p>
+        </p:txBody>
+      </p:sp>
+      <p:sp>
+        <p:nvSpPr>
           <p:cNvPr id="25" name="Slide Number Placeholder 0"/>
           <p:cNvSpPr>
             <a:spLocks noGrp="1"/>
@@ -6165,6 +7050,158 @@
       </p:sp>
       <p:sp>
         <p:nvSpPr>
+          <p:cNvPr id="17" name="Shape 15"/>
+          <p:cNvSpPr/>
+          <p:nvPr/>
+        </p:nvSpPr>
+        <p:spPr>
+          <a:xfrm>
+            <a:off x="7875600" y="91440"/>
+            <a:ext cx="3767455" cy="274320"/>
+          </a:xfrm>
+          <a:prstGeom prst="rect">
+            <a:avLst/>
+          </a:prstGeom>
+          <a:solidFill>
+            <a:srgbClr val="FEF3C7"/>
+          </a:solidFill>
+          <a:ln w="12700">
+            <a:solidFill>
+              <a:srgbClr val="B45309"/>
+            </a:solidFill>
+            <a:prstDash val="solid"/>
+          </a:ln>
+        </p:spPr>
+      </p:sp>
+      <p:sp>
+        <p:nvSpPr>
+          <p:cNvPr id="18" name="Shape 16"/>
+          <p:cNvSpPr/>
+          <p:nvPr/>
+        </p:nvSpPr>
+        <p:spPr>
+          <a:xfrm>
+            <a:off x="7875600" y="91440"/>
+            <a:ext cx="27432" cy="274320"/>
+          </a:xfrm>
+          <a:prstGeom prst="rect">
+            <a:avLst/>
+          </a:prstGeom>
+          <a:solidFill>
+            <a:srgbClr val="B45309"/>
+          </a:solidFill>
+          <a:ln w="12700">
+            <a:solidFill>
+              <a:srgbClr val="B45309"/>
+            </a:solidFill>
+            <a:prstDash val="solid"/>
+          </a:ln>
+        </p:spPr>
+      </p:sp>
+      <p:sp>
+        <p:nvSpPr>
+          <p:cNvPr id="19" name="Shape 17"/>
+          <p:cNvSpPr/>
+          <p:nvPr/>
+        </p:nvSpPr>
+        <p:spPr>
+          <a:xfrm>
+            <a:off x="7930464" y="91440"/>
+            <a:ext cx="27432" cy="274320"/>
+          </a:xfrm>
+          <a:prstGeom prst="rect">
+            <a:avLst/>
+          </a:prstGeom>
+          <a:solidFill>
+            <a:srgbClr val="B45309"/>
+          </a:solidFill>
+          <a:ln w="12700">
+            <a:solidFill>
+              <a:srgbClr val="B45309"/>
+            </a:solidFill>
+            <a:prstDash val="solid"/>
+          </a:ln>
+        </p:spPr>
+      </p:sp>
+      <p:pic>
+        <p:nvPicPr>
+          <p:cNvPr id="20" name="Image 0" descr="preencoded.png">    </p:cNvPr>
+          <p:cNvPicPr>
+            <a:picLocks noChangeAspect="1"/>
+          </p:cNvPicPr>
+          <p:nvPr/>
+        </p:nvPicPr>
+        <p:blipFill>
+          <a:blip r:embed="rId1"/>
+          <a:stretch>
+            <a:fillRect/>
+          </a:stretch>
+        </p:blipFill>
+        <p:spPr>
+          <a:xfrm>
+            <a:off x="8003616" y="128016"/>
+            <a:ext cx="201168" cy="201168"/>
+          </a:xfrm>
+          <a:prstGeom prst="rect">
+            <a:avLst/>
+          </a:prstGeom>
+        </p:spPr>
+      </p:pic>
+      <p:sp>
+        <p:nvSpPr>
+          <p:cNvPr id="21" name="Text 18"/>
+          <p:cNvSpPr txBox="1"/>
+          <p:nvPr/>
+        </p:nvSpPr>
+        <p:spPr>
+          <a:xfrm>
+            <a:off x="8259648" y="91440"/>
+            <a:ext cx="3346831" cy="274320"/>
+          </a:xfrm>
+          <a:prstGeom prst="rect">
+            <a:avLst/>
+          </a:prstGeom>
+          <a:noFill/>
+          <a:ln/>
+        </p:spPr>
+        <p:txBody>
+          <a:bodyPr wrap="square" lIns="0" tIns="0" rIns="0" bIns="0" rtlCol="0" anchor="ctr"/>
+          <a:lstStyle/>
+          <a:p>
+            <a:pPr indent="0" marL="0">
+              <a:buNone/>
+            </a:pPr>
+            <a:r>
+              <a:rPr lang="en-US" sz="1100" b="1" dirty="0">
+                <a:solidFill>
+                  <a:srgbClr val="92400E"/>
+                </a:solidFill>
+                <a:latin typeface="Calibri" pitchFamily="34" charset="0"/>
+                <a:ea typeface="Calibri" pitchFamily="34" charset="-122"/>
+                <a:cs typeface="Calibri" pitchFamily="34" charset="-120"/>
+              </a:rPr>
+              <a:t>DA UTILIZZARE OGGI</a:t>
+            </a:r>
+            <a:pPr indent="0" marL="0">
+              <a:buNone/>
+            </a:pPr>
+            <a:r>
+              <a:rPr lang="en-US" sz="1100" dirty="0">
+                <a:solidFill>
+                  <a:srgbClr val="92400E"/>
+                </a:solidFill>
+                <a:latin typeface="Calibri" pitchFamily="34" charset="0"/>
+                <a:ea typeface="Calibri" pitchFamily="34" charset="-122"/>
+                <a:cs typeface="Calibri" pitchFamily="34" charset="-120"/>
+              </a:rPr>
+              <a:t> · gli strumenti di PRG32</a:t>
+            </a:r>
+            <a:endParaRPr lang="en-US" sz="1100" dirty="0"/>
+          </a:p>
+        </p:txBody>
+      </p:sp>
+      <p:sp>
+        <p:nvSpPr>
           <p:cNvPr id="25" name="Slide Number Placeholder 0"/>
           <p:cNvSpPr>
             <a:spLocks noGrp="1"/>
@@ -6994,6 +8031,158 @@
                 <a:cs typeface="Calibri" pitchFamily="34" charset="-120"/>
               </a:rPr>
               <a:t>Schermo nero: confrontate il cablaggio del display con il firmware</a:t>
+            </a:r>
+            <a:endParaRPr lang="en-US" sz="1100" dirty="0"/>
+          </a:p>
+        </p:txBody>
+      </p:sp>
+      <p:sp>
+        <p:nvSpPr>
+          <p:cNvPr id="17" name="Shape 15"/>
+          <p:cNvSpPr/>
+          <p:nvPr/>
+        </p:nvSpPr>
+        <p:spPr>
+          <a:xfrm>
+            <a:off x="7875600" y="91440"/>
+            <a:ext cx="3767455" cy="274320"/>
+          </a:xfrm>
+          <a:prstGeom prst="rect">
+            <a:avLst/>
+          </a:prstGeom>
+          <a:solidFill>
+            <a:srgbClr val="FEF3C7"/>
+          </a:solidFill>
+          <a:ln w="12700">
+            <a:solidFill>
+              <a:srgbClr val="B45309"/>
+            </a:solidFill>
+            <a:prstDash val="solid"/>
+          </a:ln>
+        </p:spPr>
+      </p:sp>
+      <p:sp>
+        <p:nvSpPr>
+          <p:cNvPr id="18" name="Shape 16"/>
+          <p:cNvSpPr/>
+          <p:nvPr/>
+        </p:nvSpPr>
+        <p:spPr>
+          <a:xfrm>
+            <a:off x="7875600" y="91440"/>
+            <a:ext cx="27432" cy="274320"/>
+          </a:xfrm>
+          <a:prstGeom prst="rect">
+            <a:avLst/>
+          </a:prstGeom>
+          <a:solidFill>
+            <a:srgbClr val="B45309"/>
+          </a:solidFill>
+          <a:ln w="12700">
+            <a:solidFill>
+              <a:srgbClr val="B45309"/>
+            </a:solidFill>
+            <a:prstDash val="solid"/>
+          </a:ln>
+        </p:spPr>
+      </p:sp>
+      <p:sp>
+        <p:nvSpPr>
+          <p:cNvPr id="19" name="Shape 17"/>
+          <p:cNvSpPr/>
+          <p:nvPr/>
+        </p:nvSpPr>
+        <p:spPr>
+          <a:xfrm>
+            <a:off x="7930464" y="91440"/>
+            <a:ext cx="27432" cy="274320"/>
+          </a:xfrm>
+          <a:prstGeom prst="rect">
+            <a:avLst/>
+          </a:prstGeom>
+          <a:solidFill>
+            <a:srgbClr val="B45309"/>
+          </a:solidFill>
+          <a:ln w="12700">
+            <a:solidFill>
+              <a:srgbClr val="B45309"/>
+            </a:solidFill>
+            <a:prstDash val="solid"/>
+          </a:ln>
+        </p:spPr>
+      </p:sp>
+      <p:pic>
+        <p:nvPicPr>
+          <p:cNvPr id="20" name="Image 0" descr="preencoded.png">    </p:cNvPr>
+          <p:cNvPicPr>
+            <a:picLocks noChangeAspect="1"/>
+          </p:cNvPicPr>
+          <p:nvPr/>
+        </p:nvPicPr>
+        <p:blipFill>
+          <a:blip r:embed="rId1"/>
+          <a:stretch>
+            <a:fillRect/>
+          </a:stretch>
+        </p:blipFill>
+        <p:spPr>
+          <a:xfrm>
+            <a:off x="8003616" y="128016"/>
+            <a:ext cx="201168" cy="201168"/>
+          </a:xfrm>
+          <a:prstGeom prst="rect">
+            <a:avLst/>
+          </a:prstGeom>
+        </p:spPr>
+      </p:pic>
+      <p:sp>
+        <p:nvSpPr>
+          <p:cNvPr id="21" name="Text 18"/>
+          <p:cNvSpPr txBox="1"/>
+          <p:nvPr/>
+        </p:nvSpPr>
+        <p:spPr>
+          <a:xfrm>
+            <a:off x="8259648" y="91440"/>
+            <a:ext cx="3346831" cy="274320"/>
+          </a:xfrm>
+          <a:prstGeom prst="rect">
+            <a:avLst/>
+          </a:prstGeom>
+          <a:noFill/>
+          <a:ln/>
+        </p:spPr>
+        <p:txBody>
+          <a:bodyPr wrap="square" lIns="0" tIns="0" rIns="0" bIns="0" rtlCol="0" anchor="ctr"/>
+          <a:lstStyle/>
+          <a:p>
+            <a:pPr indent="0" marL="0">
+              <a:buNone/>
+            </a:pPr>
+            <a:r>
+              <a:rPr lang="en-US" sz="1100" b="1" dirty="0">
+                <a:solidFill>
+                  <a:srgbClr val="92400E"/>
+                </a:solidFill>
+                <a:latin typeface="Calibri" pitchFamily="34" charset="0"/>
+                <a:ea typeface="Calibri" pitchFamily="34" charset="-122"/>
+                <a:cs typeface="Calibri" pitchFamily="34" charset="-120"/>
+              </a:rPr>
+              <a:t>DA UTILIZZARE OGGI</a:t>
+            </a:r>
+            <a:pPr indent="0" marL="0">
+              <a:buNone/>
+            </a:pPr>
+            <a:r>
+              <a:rPr lang="en-US" sz="1100" dirty="0">
+                <a:solidFill>
+                  <a:srgbClr val="92400E"/>
+                </a:solidFill>
+                <a:latin typeface="Calibri" pitchFamily="34" charset="0"/>
+                <a:ea typeface="Calibri" pitchFamily="34" charset="-122"/>
+                <a:cs typeface="Calibri" pitchFamily="34" charset="-120"/>
+              </a:rPr>
+              <a:t> · gli strumenti di PRG32</a:t>
             </a:r>
             <a:endParaRPr lang="en-US" sz="1100" dirty="0"/>
           </a:p>
@@ -8382,6 +9571,158 @@
       </p:graphicFrame>
       <p:sp>
         <p:nvSpPr>
+          <p:cNvPr id="4" name="Shape 1"/>
+          <p:cNvSpPr/>
+          <p:nvPr/>
+        </p:nvSpPr>
+        <p:spPr>
+          <a:xfrm>
+            <a:off x="7875600" y="91440"/>
+            <a:ext cx="3767455" cy="274320"/>
+          </a:xfrm>
+          <a:prstGeom prst="rect">
+            <a:avLst/>
+          </a:prstGeom>
+          <a:solidFill>
+            <a:srgbClr val="FEF3C7"/>
+          </a:solidFill>
+          <a:ln w="12700">
+            <a:solidFill>
+              <a:srgbClr val="B45309"/>
+            </a:solidFill>
+            <a:prstDash val="solid"/>
+          </a:ln>
+        </p:spPr>
+      </p:sp>
+      <p:sp>
+        <p:nvSpPr>
+          <p:cNvPr id="5" name="Shape 2"/>
+          <p:cNvSpPr/>
+          <p:nvPr/>
+        </p:nvSpPr>
+        <p:spPr>
+          <a:xfrm>
+            <a:off x="7875600" y="91440"/>
+            <a:ext cx="27432" cy="274320"/>
+          </a:xfrm>
+          <a:prstGeom prst="rect">
+            <a:avLst/>
+          </a:prstGeom>
+          <a:solidFill>
+            <a:srgbClr val="B45309"/>
+          </a:solidFill>
+          <a:ln w="12700">
+            <a:solidFill>
+              <a:srgbClr val="B45309"/>
+            </a:solidFill>
+            <a:prstDash val="solid"/>
+          </a:ln>
+        </p:spPr>
+      </p:sp>
+      <p:sp>
+        <p:nvSpPr>
+          <p:cNvPr id="6" name="Shape 3"/>
+          <p:cNvSpPr/>
+          <p:nvPr/>
+        </p:nvSpPr>
+        <p:spPr>
+          <a:xfrm>
+            <a:off x="7930464" y="91440"/>
+            <a:ext cx="27432" cy="274320"/>
+          </a:xfrm>
+          <a:prstGeom prst="rect">
+            <a:avLst/>
+          </a:prstGeom>
+          <a:solidFill>
+            <a:srgbClr val="B45309"/>
+          </a:solidFill>
+          <a:ln w="12700">
+            <a:solidFill>
+              <a:srgbClr val="B45309"/>
+            </a:solidFill>
+            <a:prstDash val="solid"/>
+          </a:ln>
+        </p:spPr>
+      </p:sp>
+      <p:pic>
+        <p:nvPicPr>
+          <p:cNvPr id="7" name="Image 0" descr="preencoded.png">    </p:cNvPr>
+          <p:cNvPicPr>
+            <a:picLocks noChangeAspect="1"/>
+          </p:cNvPicPr>
+          <p:nvPr/>
+        </p:nvPicPr>
+        <p:blipFill>
+          <a:blip r:embed="rId1"/>
+          <a:stretch>
+            <a:fillRect/>
+          </a:stretch>
+        </p:blipFill>
+        <p:spPr>
+          <a:xfrm>
+            <a:off x="8003616" y="128016"/>
+            <a:ext cx="201168" cy="201168"/>
+          </a:xfrm>
+          <a:prstGeom prst="rect">
+            <a:avLst/>
+          </a:prstGeom>
+        </p:spPr>
+      </p:pic>
+      <p:sp>
+        <p:nvSpPr>
+          <p:cNvPr id="8" name="Text 4"/>
+          <p:cNvSpPr txBox="1"/>
+          <p:nvPr/>
+        </p:nvSpPr>
+        <p:spPr>
+          <a:xfrm>
+            <a:off x="8259648" y="91440"/>
+            <a:ext cx="3346831" cy="274320"/>
+          </a:xfrm>
+          <a:prstGeom prst="rect">
+            <a:avLst/>
+          </a:prstGeom>
+          <a:noFill/>
+          <a:ln/>
+        </p:spPr>
+        <p:txBody>
+          <a:bodyPr wrap="square" lIns="0" tIns="0" rIns="0" bIns="0" rtlCol="0" anchor="ctr"/>
+          <a:lstStyle/>
+          <a:p>
+            <a:pPr indent="0" marL="0">
+              <a:buNone/>
+            </a:pPr>
+            <a:r>
+              <a:rPr lang="en-US" sz="1100" b="1" dirty="0">
+                <a:solidFill>
+                  <a:srgbClr val="92400E"/>
+                </a:solidFill>
+                <a:latin typeface="Calibri" pitchFamily="34" charset="0"/>
+                <a:ea typeface="Calibri" pitchFamily="34" charset="-122"/>
+                <a:cs typeface="Calibri" pitchFamily="34" charset="-120"/>
+              </a:rPr>
+              <a:t>DA UTILIZZARE OGGI</a:t>
+            </a:r>
+            <a:pPr indent="0" marL="0">
+              <a:buNone/>
+            </a:pPr>
+            <a:r>
+              <a:rPr lang="en-US" sz="1100" dirty="0">
+                <a:solidFill>
+                  <a:srgbClr val="92400E"/>
+                </a:solidFill>
+                <a:latin typeface="Calibri" pitchFamily="34" charset="0"/>
+                <a:ea typeface="Calibri" pitchFamily="34" charset="-122"/>
+                <a:cs typeface="Calibri" pitchFamily="34" charset="-120"/>
+              </a:rPr>
+              <a:t> · gli strumenti di PRG32</a:t>
+            </a:r>
+            <a:endParaRPr lang="en-US" sz="1100" dirty="0"/>
+          </a:p>
+        </p:txBody>
+      </p:sp>
+      <p:sp>
+        <p:nvSpPr>
           <p:cNvPr id="25" name="Slide Number Placeholder 0"/>
           <p:cNvSpPr>
             <a:spLocks noGrp="1"/>
@@ -10459,6 +11800,133 @@
       </p:sp>
       <p:sp>
         <p:nvSpPr>
+          <p:cNvPr id="17" name="Shape 15"/>
+          <p:cNvSpPr/>
+          <p:nvPr/>
+        </p:nvSpPr>
+        <p:spPr>
+          <a:xfrm>
+            <a:off x="7985963" y="91440"/>
+            <a:ext cx="3657092" cy="274320"/>
+          </a:xfrm>
+          <a:prstGeom prst="rect">
+            <a:avLst/>
+          </a:prstGeom>
+          <a:solidFill>
+            <a:srgbClr val="E0F2FE"/>
+          </a:solidFill>
+          <a:ln w="12700">
+            <a:solidFill>
+              <a:srgbClr val="0369A1"/>
+            </a:solidFill>
+            <a:prstDash val="solid"/>
+          </a:ln>
+        </p:spPr>
+      </p:sp>
+      <p:sp>
+        <p:nvSpPr>
+          <p:cNvPr id="18" name="Shape 16"/>
+          <p:cNvSpPr/>
+          <p:nvPr/>
+        </p:nvSpPr>
+        <p:spPr>
+          <a:xfrm>
+            <a:off x="7985963" y="91440"/>
+            <a:ext cx="73152" cy="274320"/>
+          </a:xfrm>
+          <a:prstGeom prst="rect">
+            <a:avLst/>
+          </a:prstGeom>
+          <a:solidFill>
+            <a:srgbClr val="0369A1"/>
+          </a:solidFill>
+          <a:ln w="12700">
+            <a:solidFill>
+              <a:srgbClr val="0369A1"/>
+            </a:solidFill>
+            <a:prstDash val="solid"/>
+          </a:ln>
+        </p:spPr>
+      </p:sp>
+      <p:pic>
+        <p:nvPicPr>
+          <p:cNvPr id="19" name="Image 0" descr="preencoded.png">    </p:cNvPr>
+          <p:cNvPicPr>
+            <a:picLocks noChangeAspect="1"/>
+          </p:cNvPicPr>
+          <p:nvPr/>
+        </p:nvPicPr>
+        <p:blipFill>
+          <a:blip r:embed="rId1"/>
+          <a:stretch>
+            <a:fillRect/>
+          </a:stretch>
+        </p:blipFill>
+        <p:spPr>
+          <a:xfrm>
+            <a:off x="8113979" y="128016"/>
+            <a:ext cx="201168" cy="201168"/>
+          </a:xfrm>
+          <a:prstGeom prst="rect">
+            <a:avLst/>
+          </a:prstGeom>
+        </p:spPr>
+      </p:pic>
+      <p:sp>
+        <p:nvSpPr>
+          <p:cNvPr id="20" name="Text 17"/>
+          <p:cNvSpPr txBox="1"/>
+          <p:nvPr/>
+        </p:nvSpPr>
+        <p:spPr>
+          <a:xfrm>
+            <a:off x="8370011" y="91440"/>
+            <a:ext cx="3236468" cy="274320"/>
+          </a:xfrm>
+          <a:prstGeom prst="rect">
+            <a:avLst/>
+          </a:prstGeom>
+          <a:noFill/>
+          <a:ln/>
+        </p:spPr>
+        <p:txBody>
+          <a:bodyPr wrap="square" lIns="0" tIns="0" rIns="0" bIns="0" rtlCol="0" anchor="ctr"/>
+          <a:lstStyle/>
+          <a:p>
+            <a:pPr indent="0" marL="0">
+              <a:buNone/>
+            </a:pPr>
+            <a:r>
+              <a:rPr lang="en-US" sz="1100" b="1" dirty="0">
+                <a:solidFill>
+                  <a:srgbClr val="075985"/>
+                </a:solidFill>
+                <a:latin typeface="Calibri" pitchFamily="34" charset="0"/>
+                <a:ea typeface="Calibri" pitchFamily="34" charset="-122"/>
+                <a:cs typeface="Calibri" pitchFamily="34" charset="-120"/>
+              </a:rPr>
+              <a:t>DA COMPRENDERE OGGI</a:t>
+            </a:r>
+            <a:pPr indent="0" marL="0">
+              <a:buNone/>
+            </a:pPr>
+            <a:r>
+              <a:rPr lang="en-US" sz="1100" dirty="0">
+                <a:solidFill>
+                  <a:srgbClr val="075985"/>
+                </a:solidFill>
+                <a:latin typeface="Calibri" pitchFamily="34" charset="0"/>
+                <a:ea typeface="Calibri" pitchFamily="34" charset="-122"/>
+                <a:cs typeface="Calibri" pitchFamily="34" charset="-120"/>
+              </a:rPr>
+              <a:t> · memorie e indirizzi</a:t>
+            </a:r>
+            <a:endParaRPr lang="en-US" sz="1100" dirty="0"/>
+          </a:p>
+        </p:txBody>
+      </p:sp>
+      <p:sp>
+        <p:nvSpPr>
           <p:cNvPr id="25" name="Slide Number Placeholder 0"/>
           <p:cNvSpPr>
             <a:spLocks noGrp="1"/>
@@ -11082,6 +12550,133 @@
               <a:t># aligned</a:t>
             </a:r>
             <a:endParaRPr lang="en-US" sz="1600" dirty="0"/>
+          </a:p>
+        </p:txBody>
+      </p:sp>
+      <p:sp>
+        <p:nvSpPr>
+          <p:cNvPr id="15" name="Shape 13"/>
+          <p:cNvSpPr/>
+          <p:nvPr/>
+        </p:nvSpPr>
+        <p:spPr>
+          <a:xfrm>
+            <a:off x="7985963" y="91440"/>
+            <a:ext cx="3657092" cy="274320"/>
+          </a:xfrm>
+          <a:prstGeom prst="rect">
+            <a:avLst/>
+          </a:prstGeom>
+          <a:solidFill>
+            <a:srgbClr val="E0F2FE"/>
+          </a:solidFill>
+          <a:ln w="12700">
+            <a:solidFill>
+              <a:srgbClr val="0369A1"/>
+            </a:solidFill>
+            <a:prstDash val="solid"/>
+          </a:ln>
+        </p:spPr>
+      </p:sp>
+      <p:sp>
+        <p:nvSpPr>
+          <p:cNvPr id="16" name="Shape 14"/>
+          <p:cNvSpPr/>
+          <p:nvPr/>
+        </p:nvSpPr>
+        <p:spPr>
+          <a:xfrm>
+            <a:off x="7985963" y="91440"/>
+            <a:ext cx="73152" cy="274320"/>
+          </a:xfrm>
+          <a:prstGeom prst="rect">
+            <a:avLst/>
+          </a:prstGeom>
+          <a:solidFill>
+            <a:srgbClr val="0369A1"/>
+          </a:solidFill>
+          <a:ln w="12700">
+            <a:solidFill>
+              <a:srgbClr val="0369A1"/>
+            </a:solidFill>
+            <a:prstDash val="solid"/>
+          </a:ln>
+        </p:spPr>
+      </p:sp>
+      <p:pic>
+        <p:nvPicPr>
+          <p:cNvPr id="17" name="Image 0" descr="preencoded.png">    </p:cNvPr>
+          <p:cNvPicPr>
+            <a:picLocks noChangeAspect="1"/>
+          </p:cNvPicPr>
+          <p:nvPr/>
+        </p:nvPicPr>
+        <p:blipFill>
+          <a:blip r:embed="rId1"/>
+          <a:stretch>
+            <a:fillRect/>
+          </a:stretch>
+        </p:blipFill>
+        <p:spPr>
+          <a:xfrm>
+            <a:off x="8113979" y="128016"/>
+            <a:ext cx="201168" cy="201168"/>
+          </a:xfrm>
+          <a:prstGeom prst="rect">
+            <a:avLst/>
+          </a:prstGeom>
+        </p:spPr>
+      </p:pic>
+      <p:sp>
+        <p:nvSpPr>
+          <p:cNvPr id="18" name="Text 15"/>
+          <p:cNvSpPr txBox="1"/>
+          <p:nvPr/>
+        </p:nvSpPr>
+        <p:spPr>
+          <a:xfrm>
+            <a:off x="8370011" y="91440"/>
+            <a:ext cx="3236468" cy="274320"/>
+          </a:xfrm>
+          <a:prstGeom prst="rect">
+            <a:avLst/>
+          </a:prstGeom>
+          <a:noFill/>
+          <a:ln/>
+        </p:spPr>
+        <p:txBody>
+          <a:bodyPr wrap="square" lIns="0" tIns="0" rIns="0" bIns="0" rtlCol="0" anchor="ctr"/>
+          <a:lstStyle/>
+          <a:p>
+            <a:pPr indent="0" marL="0">
+              <a:buNone/>
+            </a:pPr>
+            <a:r>
+              <a:rPr lang="en-US" sz="1100" b="1" dirty="0">
+                <a:solidFill>
+                  <a:srgbClr val="075985"/>
+                </a:solidFill>
+                <a:latin typeface="Calibri" pitchFamily="34" charset="0"/>
+                <a:ea typeface="Calibri" pitchFamily="34" charset="-122"/>
+                <a:cs typeface="Calibri" pitchFamily="34" charset="-120"/>
+              </a:rPr>
+              <a:t>DA COMPRENDERE OGGI</a:t>
+            </a:r>
+            <a:pPr indent="0" marL="0">
+              <a:buNone/>
+            </a:pPr>
+            <a:r>
+              <a:rPr lang="en-US" sz="1100" dirty="0">
+                <a:solidFill>
+                  <a:srgbClr val="075985"/>
+                </a:solidFill>
+                <a:latin typeface="Calibri" pitchFamily="34" charset="0"/>
+                <a:ea typeface="Calibri" pitchFamily="34" charset="-122"/>
+                <a:cs typeface="Calibri" pitchFamily="34" charset="-120"/>
+              </a:rPr>
+              <a:t> · memorie e indirizzi</a:t>
+            </a:r>
+            <a:endParaRPr lang="en-US" sz="1100" dirty="0"/>
           </a:p>
         </p:txBody>
       </p:sp>
@@ -12713,6 +14308,133 @@
       </p:sp>
       <p:sp>
         <p:nvSpPr>
+          <p:cNvPr id="5" name="Shape 2"/>
+          <p:cNvSpPr/>
+          <p:nvPr/>
+        </p:nvSpPr>
+        <p:spPr>
+          <a:xfrm>
+            <a:off x="7920304" y="91440"/>
+            <a:ext cx="3722751" cy="274320"/>
+          </a:xfrm>
+          <a:prstGeom prst="rect">
+            <a:avLst/>
+          </a:prstGeom>
+          <a:solidFill>
+            <a:srgbClr val="E0F2FE"/>
+          </a:solidFill>
+          <a:ln w="12700">
+            <a:solidFill>
+              <a:srgbClr val="0369A1"/>
+            </a:solidFill>
+            <a:prstDash val="solid"/>
+          </a:ln>
+        </p:spPr>
+      </p:sp>
+      <p:sp>
+        <p:nvSpPr>
+          <p:cNvPr id="6" name="Shape 3"/>
+          <p:cNvSpPr/>
+          <p:nvPr/>
+        </p:nvSpPr>
+        <p:spPr>
+          <a:xfrm>
+            <a:off x="7920304" y="91440"/>
+            <a:ext cx="73152" cy="274320"/>
+          </a:xfrm>
+          <a:prstGeom prst="rect">
+            <a:avLst/>
+          </a:prstGeom>
+          <a:solidFill>
+            <a:srgbClr val="0369A1"/>
+          </a:solidFill>
+          <a:ln w="12700">
+            <a:solidFill>
+              <a:srgbClr val="0369A1"/>
+            </a:solidFill>
+            <a:prstDash val="solid"/>
+          </a:ln>
+        </p:spPr>
+      </p:sp>
+      <p:pic>
+        <p:nvPicPr>
+          <p:cNvPr id="7" name="Image 0" descr="preencoded.png">    </p:cNvPr>
+          <p:cNvPicPr>
+            <a:picLocks noChangeAspect="1"/>
+          </p:cNvPicPr>
+          <p:nvPr/>
+        </p:nvPicPr>
+        <p:blipFill>
+          <a:blip r:embed="rId1"/>
+          <a:stretch>
+            <a:fillRect/>
+          </a:stretch>
+        </p:blipFill>
+        <p:spPr>
+          <a:xfrm>
+            <a:off x="8048320" y="128016"/>
+            <a:ext cx="201168" cy="201168"/>
+          </a:xfrm>
+          <a:prstGeom prst="rect">
+            <a:avLst/>
+          </a:prstGeom>
+        </p:spPr>
+      </p:pic>
+      <p:sp>
+        <p:nvSpPr>
+          <p:cNvPr id="8" name="Text 4"/>
+          <p:cNvSpPr txBox="1"/>
+          <p:nvPr/>
+        </p:nvSpPr>
+        <p:spPr>
+          <a:xfrm>
+            <a:off x="8304352" y="91440"/>
+            <a:ext cx="3302127" cy="274320"/>
+          </a:xfrm>
+          <a:prstGeom prst="rect">
+            <a:avLst/>
+          </a:prstGeom>
+          <a:noFill/>
+          <a:ln/>
+        </p:spPr>
+        <p:txBody>
+          <a:bodyPr wrap="square" lIns="0" tIns="0" rIns="0" bIns="0" rtlCol="0" anchor="ctr"/>
+          <a:lstStyle/>
+          <a:p>
+            <a:pPr indent="0" marL="0">
+              <a:buNone/>
+            </a:pPr>
+            <a:r>
+              <a:rPr lang="en-US" sz="1100" b="1" dirty="0">
+                <a:solidFill>
+                  <a:srgbClr val="075985"/>
+                </a:solidFill>
+                <a:latin typeface="Calibri" pitchFamily="34" charset="0"/>
+                <a:ea typeface="Calibri" pitchFamily="34" charset="-122"/>
+                <a:cs typeface="Calibri" pitchFamily="34" charset="-120"/>
+              </a:rPr>
+              <a:t>DA COMPRENDERE OGGI</a:t>
+            </a:r>
+            <a:pPr indent="0" marL="0">
+              <a:buNone/>
+            </a:pPr>
+            <a:r>
+              <a:rPr lang="en-US" sz="1100" dirty="0">
+                <a:solidFill>
+                  <a:srgbClr val="075985"/>
+                </a:solidFill>
+                <a:latin typeface="Calibri" pitchFamily="34" charset="0"/>
+                <a:ea typeface="Calibri" pitchFamily="34" charset="-122"/>
+                <a:cs typeface="Calibri" pitchFamily="34" charset="-120"/>
+              </a:rPr>
+              <a:t> · processore e memoria</a:t>
+            </a:r>
+            <a:endParaRPr lang="en-US" sz="1100" dirty="0"/>
+          </a:p>
+        </p:txBody>
+      </p:sp>
+      <p:sp>
+        <p:nvSpPr>
           <p:cNvPr id="25" name="Slide Number Placeholder 0"/>
           <p:cNvSpPr>
             <a:spLocks noGrp="1"/>
@@ -13927,6 +15649,133 @@
       </p:sp>
       <p:sp>
         <p:nvSpPr>
+          <p:cNvPr id="5" name="Shape 2"/>
+          <p:cNvSpPr/>
+          <p:nvPr/>
+        </p:nvSpPr>
+        <p:spPr>
+          <a:xfrm>
+            <a:off x="7657668" y="91440"/>
+            <a:ext cx="3985387" cy="274320"/>
+          </a:xfrm>
+          <a:prstGeom prst="rect">
+            <a:avLst/>
+          </a:prstGeom>
+          <a:solidFill>
+            <a:srgbClr val="E0F2FE"/>
+          </a:solidFill>
+          <a:ln w="12700">
+            <a:solidFill>
+              <a:srgbClr val="0369A1"/>
+            </a:solidFill>
+            <a:prstDash val="solid"/>
+          </a:ln>
+        </p:spPr>
+      </p:sp>
+      <p:sp>
+        <p:nvSpPr>
+          <p:cNvPr id="6" name="Shape 3"/>
+          <p:cNvSpPr/>
+          <p:nvPr/>
+        </p:nvSpPr>
+        <p:spPr>
+          <a:xfrm>
+            <a:off x="7657668" y="91440"/>
+            <a:ext cx="73152" cy="274320"/>
+          </a:xfrm>
+          <a:prstGeom prst="rect">
+            <a:avLst/>
+          </a:prstGeom>
+          <a:solidFill>
+            <a:srgbClr val="0369A1"/>
+          </a:solidFill>
+          <a:ln w="12700">
+            <a:solidFill>
+              <a:srgbClr val="0369A1"/>
+            </a:solidFill>
+            <a:prstDash val="solid"/>
+          </a:ln>
+        </p:spPr>
+      </p:sp>
+      <p:pic>
+        <p:nvPicPr>
+          <p:cNvPr id="7" name="Image 0" descr="preencoded.png">    </p:cNvPr>
+          <p:cNvPicPr>
+            <a:picLocks noChangeAspect="1"/>
+          </p:cNvPicPr>
+          <p:nvPr/>
+        </p:nvPicPr>
+        <p:blipFill>
+          <a:blip r:embed="rId1"/>
+          <a:stretch>
+            <a:fillRect/>
+          </a:stretch>
+        </p:blipFill>
+        <p:spPr>
+          <a:xfrm>
+            <a:off x="7785684" y="128016"/>
+            <a:ext cx="201168" cy="201168"/>
+          </a:xfrm>
+          <a:prstGeom prst="rect">
+            <a:avLst/>
+          </a:prstGeom>
+        </p:spPr>
+      </p:pic>
+      <p:sp>
+        <p:nvSpPr>
+          <p:cNvPr id="8" name="Text 4"/>
+          <p:cNvSpPr txBox="1"/>
+          <p:nvPr/>
+        </p:nvSpPr>
+        <p:spPr>
+          <a:xfrm>
+            <a:off x="8041716" y="91440"/>
+            <a:ext cx="3564763" cy="274320"/>
+          </a:xfrm>
+          <a:prstGeom prst="rect">
+            <a:avLst/>
+          </a:prstGeom>
+          <a:noFill/>
+          <a:ln/>
+        </p:spPr>
+        <p:txBody>
+          <a:bodyPr wrap="square" lIns="0" tIns="0" rIns="0" bIns="0" rtlCol="0" anchor="ctr"/>
+          <a:lstStyle/>
+          <a:p>
+            <a:pPr indent="0" marL="0">
+              <a:buNone/>
+            </a:pPr>
+            <a:r>
+              <a:rPr lang="en-US" sz="1100" b="1" dirty="0">
+                <a:solidFill>
+                  <a:srgbClr val="075985"/>
+                </a:solidFill>
+                <a:latin typeface="Calibri" pitchFamily="34" charset="0"/>
+                <a:ea typeface="Calibri" pitchFamily="34" charset="-122"/>
+                <a:cs typeface="Calibri" pitchFamily="34" charset="-120"/>
+              </a:rPr>
+              <a:t>DA COMPRENDERE OGGI</a:t>
+            </a:r>
+            <a:pPr indent="0" marL="0">
+              <a:buNone/>
+            </a:pPr>
+            <a:r>
+              <a:rPr lang="en-US" sz="1100" dirty="0">
+                <a:solidFill>
+                  <a:srgbClr val="075985"/>
+                </a:solidFill>
+                <a:latin typeface="Calibri" pitchFamily="34" charset="0"/>
+                <a:ea typeface="Calibri" pitchFamily="34" charset="-122"/>
+                <a:cs typeface="Calibri" pitchFamily="34" charset="-120"/>
+              </a:rPr>
+              <a:t> · l'I/O mappato in memoria</a:t>
+            </a:r>
+            <a:endParaRPr lang="en-US" sz="1100" dirty="0"/>
+          </a:p>
+        </p:txBody>
+      </p:sp>
+      <p:sp>
+        <p:nvSpPr>
           <p:cNvPr id="25" name="Slide Number Placeholder 0"/>
           <p:cNvSpPr>
             <a:spLocks noGrp="1"/>
@@ -14464,6 +16313,158 @@
       </p:sp>
       <p:sp>
         <p:nvSpPr>
+          <p:cNvPr id="5" name="Shape 3"/>
+          <p:cNvSpPr/>
+          <p:nvPr/>
+        </p:nvSpPr>
+        <p:spPr>
+          <a:xfrm>
+            <a:off x="7941259" y="91440"/>
+            <a:ext cx="3701796" cy="274320"/>
+          </a:xfrm>
+          <a:prstGeom prst="rect">
+            <a:avLst/>
+          </a:prstGeom>
+          <a:solidFill>
+            <a:srgbClr val="FEF3C7"/>
+          </a:solidFill>
+          <a:ln w="12700">
+            <a:solidFill>
+              <a:srgbClr val="B45309"/>
+            </a:solidFill>
+            <a:prstDash val="solid"/>
+          </a:ln>
+        </p:spPr>
+      </p:sp>
+      <p:sp>
+        <p:nvSpPr>
+          <p:cNvPr id="6" name="Shape 4"/>
+          <p:cNvSpPr/>
+          <p:nvPr/>
+        </p:nvSpPr>
+        <p:spPr>
+          <a:xfrm>
+            <a:off x="7941259" y="91440"/>
+            <a:ext cx="27432" cy="274320"/>
+          </a:xfrm>
+          <a:prstGeom prst="rect">
+            <a:avLst/>
+          </a:prstGeom>
+          <a:solidFill>
+            <a:srgbClr val="B45309"/>
+          </a:solidFill>
+          <a:ln w="12700">
+            <a:solidFill>
+              <a:srgbClr val="B45309"/>
+            </a:solidFill>
+            <a:prstDash val="solid"/>
+          </a:ln>
+        </p:spPr>
+      </p:sp>
+      <p:sp>
+        <p:nvSpPr>
+          <p:cNvPr id="7" name="Shape 5"/>
+          <p:cNvSpPr/>
+          <p:nvPr/>
+        </p:nvSpPr>
+        <p:spPr>
+          <a:xfrm>
+            <a:off x="7996123" y="91440"/>
+            <a:ext cx="27432" cy="274320"/>
+          </a:xfrm>
+          <a:prstGeom prst="rect">
+            <a:avLst/>
+          </a:prstGeom>
+          <a:solidFill>
+            <a:srgbClr val="B45309"/>
+          </a:solidFill>
+          <a:ln w="12700">
+            <a:solidFill>
+              <a:srgbClr val="B45309"/>
+            </a:solidFill>
+            <a:prstDash val="solid"/>
+          </a:ln>
+        </p:spPr>
+      </p:sp>
+      <p:pic>
+        <p:nvPicPr>
+          <p:cNvPr id="8" name="Image 0" descr="preencoded.png">    </p:cNvPr>
+          <p:cNvPicPr>
+            <a:picLocks noChangeAspect="1"/>
+          </p:cNvPicPr>
+          <p:nvPr/>
+        </p:nvPicPr>
+        <p:blipFill>
+          <a:blip r:embed="rId1"/>
+          <a:stretch>
+            <a:fillRect/>
+          </a:stretch>
+        </p:blipFill>
+        <p:spPr>
+          <a:xfrm>
+            <a:off x="8069275" y="128016"/>
+            <a:ext cx="201168" cy="201168"/>
+          </a:xfrm>
+          <a:prstGeom prst="rect">
+            <a:avLst/>
+          </a:prstGeom>
+        </p:spPr>
+      </p:pic>
+      <p:sp>
+        <p:nvSpPr>
+          <p:cNvPr id="9" name="Text 6"/>
+          <p:cNvSpPr txBox="1"/>
+          <p:nvPr/>
+        </p:nvSpPr>
+        <p:spPr>
+          <a:xfrm>
+            <a:off x="8325307" y="91440"/>
+            <a:ext cx="3281172" cy="274320"/>
+          </a:xfrm>
+          <a:prstGeom prst="rect">
+            <a:avLst/>
+          </a:prstGeom>
+          <a:noFill/>
+          <a:ln/>
+        </p:spPr>
+        <p:txBody>
+          <a:bodyPr wrap="square" lIns="0" tIns="0" rIns="0" bIns="0" rtlCol="0" anchor="ctr"/>
+          <a:lstStyle/>
+          <a:p>
+            <a:pPr indent="0" marL="0">
+              <a:buNone/>
+            </a:pPr>
+            <a:r>
+              <a:rPr lang="en-US" sz="1100" b="1" dirty="0">
+                <a:solidFill>
+                  <a:srgbClr val="92400E"/>
+                </a:solidFill>
+                <a:latin typeface="Calibri" pitchFamily="34" charset="0"/>
+                <a:ea typeface="Calibri" pitchFamily="34" charset="-122"/>
+                <a:cs typeface="Calibri" pitchFamily="34" charset="-120"/>
+              </a:rPr>
+              <a:t>DA UTILIZZARE OGGI</a:t>
+            </a:r>
+            <a:pPr indent="0" marL="0">
+              <a:buNone/>
+            </a:pPr>
+            <a:r>
+              <a:rPr lang="en-US" sz="1100" dirty="0">
+                <a:solidFill>
+                  <a:srgbClr val="92400E"/>
+                </a:solidFill>
+                <a:latin typeface="Calibri" pitchFamily="34" charset="0"/>
+                <a:ea typeface="Calibri" pitchFamily="34" charset="-122"/>
+                <a:cs typeface="Calibri" pitchFamily="34" charset="-120"/>
+              </a:rPr>
+              <a:t> · il programma completo</a:t>
+            </a:r>
+            <a:endParaRPr lang="en-US" sz="1100" dirty="0"/>
+          </a:p>
+        </p:txBody>
+      </p:sp>
+      <p:sp>
+        <p:nvSpPr>
           <p:cNvPr id="25" name="Slide Number Placeholder 0"/>
           <p:cNvSpPr>
             <a:spLocks noGrp="1"/>
@@ -14862,6 +16863,158 @@
       </p:sp>
       <p:sp>
         <p:nvSpPr>
+          <p:cNvPr id="5" name="Shape 3"/>
+          <p:cNvSpPr/>
+          <p:nvPr/>
+        </p:nvSpPr>
+        <p:spPr>
+          <a:xfrm>
+            <a:off x="7941259" y="91440"/>
+            <a:ext cx="3701796" cy="274320"/>
+          </a:xfrm>
+          <a:prstGeom prst="rect">
+            <a:avLst/>
+          </a:prstGeom>
+          <a:solidFill>
+            <a:srgbClr val="FEF3C7"/>
+          </a:solidFill>
+          <a:ln w="12700">
+            <a:solidFill>
+              <a:srgbClr val="B45309"/>
+            </a:solidFill>
+            <a:prstDash val="solid"/>
+          </a:ln>
+        </p:spPr>
+      </p:sp>
+      <p:sp>
+        <p:nvSpPr>
+          <p:cNvPr id="6" name="Shape 4"/>
+          <p:cNvSpPr/>
+          <p:nvPr/>
+        </p:nvSpPr>
+        <p:spPr>
+          <a:xfrm>
+            <a:off x="7941259" y="91440"/>
+            <a:ext cx="27432" cy="274320"/>
+          </a:xfrm>
+          <a:prstGeom prst="rect">
+            <a:avLst/>
+          </a:prstGeom>
+          <a:solidFill>
+            <a:srgbClr val="B45309"/>
+          </a:solidFill>
+          <a:ln w="12700">
+            <a:solidFill>
+              <a:srgbClr val="B45309"/>
+            </a:solidFill>
+            <a:prstDash val="solid"/>
+          </a:ln>
+        </p:spPr>
+      </p:sp>
+      <p:sp>
+        <p:nvSpPr>
+          <p:cNvPr id="7" name="Shape 5"/>
+          <p:cNvSpPr/>
+          <p:nvPr/>
+        </p:nvSpPr>
+        <p:spPr>
+          <a:xfrm>
+            <a:off x="7996123" y="91440"/>
+            <a:ext cx="27432" cy="274320"/>
+          </a:xfrm>
+          <a:prstGeom prst="rect">
+            <a:avLst/>
+          </a:prstGeom>
+          <a:solidFill>
+            <a:srgbClr val="B45309"/>
+          </a:solidFill>
+          <a:ln w="12700">
+            <a:solidFill>
+              <a:srgbClr val="B45309"/>
+            </a:solidFill>
+            <a:prstDash val="solid"/>
+          </a:ln>
+        </p:spPr>
+      </p:sp>
+      <p:pic>
+        <p:nvPicPr>
+          <p:cNvPr id="8" name="Image 0" descr="preencoded.png">    </p:cNvPr>
+          <p:cNvPicPr>
+            <a:picLocks noChangeAspect="1"/>
+          </p:cNvPicPr>
+          <p:nvPr/>
+        </p:nvPicPr>
+        <p:blipFill>
+          <a:blip r:embed="rId1"/>
+          <a:stretch>
+            <a:fillRect/>
+          </a:stretch>
+        </p:blipFill>
+        <p:spPr>
+          <a:xfrm>
+            <a:off x="8069275" y="128016"/>
+            <a:ext cx="201168" cy="201168"/>
+          </a:xfrm>
+          <a:prstGeom prst="rect">
+            <a:avLst/>
+          </a:prstGeom>
+        </p:spPr>
+      </p:pic>
+      <p:sp>
+        <p:nvSpPr>
+          <p:cNvPr id="9" name="Text 6"/>
+          <p:cNvSpPr txBox="1"/>
+          <p:nvPr/>
+        </p:nvSpPr>
+        <p:spPr>
+          <a:xfrm>
+            <a:off x="8325307" y="91440"/>
+            <a:ext cx="3281172" cy="274320"/>
+          </a:xfrm>
+          <a:prstGeom prst="rect">
+            <a:avLst/>
+          </a:prstGeom>
+          <a:noFill/>
+          <a:ln/>
+        </p:spPr>
+        <p:txBody>
+          <a:bodyPr wrap="square" lIns="0" tIns="0" rIns="0" bIns="0" rtlCol="0" anchor="ctr"/>
+          <a:lstStyle/>
+          <a:p>
+            <a:pPr indent="0" marL="0">
+              <a:buNone/>
+            </a:pPr>
+            <a:r>
+              <a:rPr lang="en-US" sz="1100" b="1" dirty="0">
+                <a:solidFill>
+                  <a:srgbClr val="92400E"/>
+                </a:solidFill>
+                <a:latin typeface="Calibri" pitchFamily="34" charset="0"/>
+                <a:ea typeface="Calibri" pitchFamily="34" charset="-122"/>
+                <a:cs typeface="Calibri" pitchFamily="34" charset="-120"/>
+              </a:rPr>
+              <a:t>DA UTILIZZARE OGGI</a:t>
+            </a:r>
+            <a:pPr indent="0" marL="0">
+              <a:buNone/>
+            </a:pPr>
+            <a:r>
+              <a:rPr lang="en-US" sz="1100" dirty="0">
+                <a:solidFill>
+                  <a:srgbClr val="92400E"/>
+                </a:solidFill>
+                <a:latin typeface="Calibri" pitchFamily="34" charset="0"/>
+                <a:ea typeface="Calibri" pitchFamily="34" charset="-122"/>
+                <a:cs typeface="Calibri" pitchFamily="34" charset="-120"/>
+              </a:rPr>
+              <a:t> · il programma completo</a:t>
+            </a:r>
+            <a:endParaRPr lang="en-US" sz="1100" dirty="0"/>
+          </a:p>
+        </p:txBody>
+      </p:sp>
+      <p:sp>
+        <p:nvSpPr>
           <p:cNvPr id="25" name="Slide Number Placeholder 0"/>
           <p:cNvSpPr>
             <a:spLocks noGrp="1"/>
@@ -15444,6 +17597,158 @@
               <a:t>    ret</a:t>
             </a:r>
             <a:endParaRPr lang="en-US" sz="1400" dirty="0"/>
+          </a:p>
+        </p:txBody>
+      </p:sp>
+      <p:sp>
+        <p:nvSpPr>
+          <p:cNvPr id="5" name="Shape 3"/>
+          <p:cNvSpPr/>
+          <p:nvPr/>
+        </p:nvSpPr>
+        <p:spPr>
+          <a:xfrm>
+            <a:off x="7941259" y="91440"/>
+            <a:ext cx="3701796" cy="274320"/>
+          </a:xfrm>
+          <a:prstGeom prst="rect">
+            <a:avLst/>
+          </a:prstGeom>
+          <a:solidFill>
+            <a:srgbClr val="FEF3C7"/>
+          </a:solidFill>
+          <a:ln w="12700">
+            <a:solidFill>
+              <a:srgbClr val="B45309"/>
+            </a:solidFill>
+            <a:prstDash val="solid"/>
+          </a:ln>
+        </p:spPr>
+      </p:sp>
+      <p:sp>
+        <p:nvSpPr>
+          <p:cNvPr id="6" name="Shape 4"/>
+          <p:cNvSpPr/>
+          <p:nvPr/>
+        </p:nvSpPr>
+        <p:spPr>
+          <a:xfrm>
+            <a:off x="7941259" y="91440"/>
+            <a:ext cx="27432" cy="274320"/>
+          </a:xfrm>
+          <a:prstGeom prst="rect">
+            <a:avLst/>
+          </a:prstGeom>
+          <a:solidFill>
+            <a:srgbClr val="B45309"/>
+          </a:solidFill>
+          <a:ln w="12700">
+            <a:solidFill>
+              <a:srgbClr val="B45309"/>
+            </a:solidFill>
+            <a:prstDash val="solid"/>
+          </a:ln>
+        </p:spPr>
+      </p:sp>
+      <p:sp>
+        <p:nvSpPr>
+          <p:cNvPr id="7" name="Shape 5"/>
+          <p:cNvSpPr/>
+          <p:nvPr/>
+        </p:nvSpPr>
+        <p:spPr>
+          <a:xfrm>
+            <a:off x="7996123" y="91440"/>
+            <a:ext cx="27432" cy="274320"/>
+          </a:xfrm>
+          <a:prstGeom prst="rect">
+            <a:avLst/>
+          </a:prstGeom>
+          <a:solidFill>
+            <a:srgbClr val="B45309"/>
+          </a:solidFill>
+          <a:ln w="12700">
+            <a:solidFill>
+              <a:srgbClr val="B45309"/>
+            </a:solidFill>
+            <a:prstDash val="solid"/>
+          </a:ln>
+        </p:spPr>
+      </p:sp>
+      <p:pic>
+        <p:nvPicPr>
+          <p:cNvPr id="8" name="Image 0" descr="preencoded.png">    </p:cNvPr>
+          <p:cNvPicPr>
+            <a:picLocks noChangeAspect="1"/>
+          </p:cNvPicPr>
+          <p:nvPr/>
+        </p:nvPicPr>
+        <p:blipFill>
+          <a:blip r:embed="rId1"/>
+          <a:stretch>
+            <a:fillRect/>
+          </a:stretch>
+        </p:blipFill>
+        <p:spPr>
+          <a:xfrm>
+            <a:off x="8069275" y="128016"/>
+            <a:ext cx="201168" cy="201168"/>
+          </a:xfrm>
+          <a:prstGeom prst="rect">
+            <a:avLst/>
+          </a:prstGeom>
+        </p:spPr>
+      </p:pic>
+      <p:sp>
+        <p:nvSpPr>
+          <p:cNvPr id="9" name="Text 6"/>
+          <p:cNvSpPr txBox="1"/>
+          <p:nvPr/>
+        </p:nvSpPr>
+        <p:spPr>
+          <a:xfrm>
+            <a:off x="8325307" y="91440"/>
+            <a:ext cx="3281172" cy="274320"/>
+          </a:xfrm>
+          <a:prstGeom prst="rect">
+            <a:avLst/>
+          </a:prstGeom>
+          <a:noFill/>
+          <a:ln/>
+        </p:spPr>
+        <p:txBody>
+          <a:bodyPr wrap="square" lIns="0" tIns="0" rIns="0" bIns="0" rtlCol="0" anchor="ctr"/>
+          <a:lstStyle/>
+          <a:p>
+            <a:pPr indent="0" marL="0">
+              <a:buNone/>
+            </a:pPr>
+            <a:r>
+              <a:rPr lang="en-US" sz="1100" b="1" dirty="0">
+                <a:solidFill>
+                  <a:srgbClr val="92400E"/>
+                </a:solidFill>
+                <a:latin typeface="Calibri" pitchFamily="34" charset="0"/>
+                <a:ea typeface="Calibri" pitchFamily="34" charset="-122"/>
+                <a:cs typeface="Calibri" pitchFamily="34" charset="-120"/>
+              </a:rPr>
+              <a:t>DA UTILIZZARE OGGI</a:t>
+            </a:r>
+            <a:pPr indent="0" marL="0">
+              <a:buNone/>
+            </a:pPr>
+            <a:r>
+              <a:rPr lang="en-US" sz="1100" dirty="0">
+                <a:solidFill>
+                  <a:srgbClr val="92400E"/>
+                </a:solidFill>
+                <a:latin typeface="Calibri" pitchFamily="34" charset="0"/>
+                <a:ea typeface="Calibri" pitchFamily="34" charset="-122"/>
+                <a:cs typeface="Calibri" pitchFamily="34" charset="-120"/>
+              </a:rPr>
+              <a:t> · il programma completo</a:t>
+            </a:r>
+            <a:endParaRPr lang="en-US" sz="1100" dirty="0"/>
           </a:p>
         </p:txBody>
       </p:sp>

--- a/it/slides/15-Architettura_dei_Calcolatori-Memoria-Codice.pptx
+++ b/it/slides/15-Architettura_dei_Calcolatori-Memoria-Codice.pptx
@@ -123,33 +123,33 @@
   <p:extLst>
     <p:ext uri="{521415D9-36F7-43E2-AB2F-B90AF26B5E84}">
       <p14:sectionLst xmlns:p14="http://schemas.microsoft.com/office/powerpoint/2010/main">
-        <p14:section name="Apertura" id="{aa63c37a-7936-693e-2415-9f505e08f6cc}">
+        <p14:section name="Apertura" id="{38da52d9-77f7-93cc-db5d-5808c2436d47}">
           <p14:sldIdLst>
             <p14:sldId id="256"/>
             <p14:sldId id="257"/>
           </p14:sldIdLst>
         </p14:section>
-        <p14:section name="Riscaldamento sulla macchina" id="{68a01ab5-0c9b-c101-918d-47746e9c154a}">
+        <p14:section name="Riscaldamento sulla macchina" id="{25da16ce-0b71-9797-991f-5575c951b276}">
           <p14:sldIdLst>
             <p14:sldId id="258"/>
           </p14:sldIdLst>
         </p14:section>
-        <p14:section name="La memoria centrale" id="{5e94a335-32a7-f009-1ff5-0c1415773c31}">
+        <p14:section name="La memoria centrale" id="{00cb364b-7ae1-38ec-e059-0167c04b62c1}">
           <p14:sldIdLst>
             <p14:sldId id="259"/>
           </p14:sldIdLst>
         </p14:section>
-        <p14:section name="Processore e memoria" id="{1b3b1ee3-05c1-7eb6-c3f9-410c8731187b}">
+        <p14:section name="Processore e memoria" id="{c53660f7-8f70-49f7-d77d-ec73c4f27fcc}">
           <p14:sldIdLst>
             <p14:sldId id="260"/>
           </p14:sldIdLst>
         </p14:section>
-        <p14:section name="Memoria e ingresso/uscita" id="{13bbb170-496d-62e7-fc51-da98d40b475c}">
+        <p14:section name="Memoria e ingresso/uscita" id="{705aedd3-1e26-7cba-0d77-b40027666b77}">
           <p14:sldIdLst>
             <p14:sldId id="261"/>
           </p14:sldIdLst>
         </p14:section>
-        <p14:section name="Il programma completo" id="{914a8e34-ed91-5956-70aa-f1ab7dd7330c}">
+        <p14:section name="Il programma completo" id="{ed60b93e-f948-0504-6369-52407a3c17b3}">
           <p14:sldIdLst>
             <p14:sldId id="262"/>
             <p14:sldId id="263"/>
@@ -158,7 +158,7 @@
             <p14:sldId id="266"/>
           </p14:sldIdLst>
         </p14:section>
-        <p14:section name="Eseguire e provare" id="{827187fa-5de3-bc10-e1a3-7a36531c520e}">
+        <p14:section name="Eseguire e provare" id="{1999e656-2bda-9820-8e5e-ab6d70f34f41}">
           <p14:sldIdLst>
             <p14:sldId id="267"/>
             <p14:sldId id="268"/>
@@ -167,7 +167,7 @@
             <p14:sldId id="271"/>
           </p14:sldIdLst>
         </p14:section>
-        <p14:section name="Esercizi" id="{51c53268-e1c5-de29-e13e-369b292fdcbc}">
+        <p14:section name="Esercizi" id="{19a2c073-9a6a-1830-196d-6b0cc9801737}">
           <p14:sldIdLst>
             <p14:sldId id="272"/>
           </p14:sldIdLst>
